--- a/Arranjo_Ordenado.pptx
+++ b/Arranjo_Ordenado.pptx
@@ -16,6 +16,9 @@
     <p:sldId id="261" r:id="rId12"/>
     <p:sldId id="262" r:id="rId13"/>
     <p:sldId id="263" r:id="rId14"/>
+    <p:sldId id="264" r:id="rId15"/>
+    <p:sldId id="265" r:id="rId16"/>
+    <p:sldId id="266" r:id="rId17"/>
   </p:sldIdLst>
   <p:sldSz cy="6858000" cx="9144000"/>
   <p:notesSz cx="6858000" cy="9144000"/>
@@ -264,7 +267,7 @@
       </p15:sldGuideLst>
     </p:ext>
     <p:ext uri="GoogleSlidesCustomDataVersion2">
-      <go:slidesCustomData xmlns:go="http://customooxmlschemas.google.com/" r:id="rId15" roundtripDataSignature="AMtx7mgelnxzrD4KOwPgKDAOFEFQpDCAEw=="/>
+      <go:slidesCustomData xmlns:go="http://customooxmlschemas.google.com/" r:id="rId18" roundtripDataSignature="AMtx7mjHl2whEdyoCI+q9FUdSu8B0VC+Xg=="/>
     </p:ext>
   </p:extLst>
 </p:presentation>
@@ -795,6 +798,204 @@
 </p:notes>
 </file>
 
+<file path=ppt/notesSlides/notesSlide10.xml><?xml version="1.0" encoding="utf-8"?>
+<p:notes xmlns:a="http://schemas.openxmlformats.org/drawingml/2006/main" xmlns:r="http://schemas.openxmlformats.org/officeDocument/2006/relationships" xmlns:mc="http://schemas.openxmlformats.org/markup-compatibility/2006" xmlns:mv="urn:schemas-microsoft-com:mac:vml" xmlns:p="http://schemas.openxmlformats.org/presentationml/2006/main" xmlns:c="http://schemas.openxmlformats.org/drawingml/2006/chart" xmlns:dgm="http://schemas.openxmlformats.org/drawingml/2006/diagram" xmlns:o="urn:schemas-microsoft-com:office:office" xmlns:v="urn:schemas-microsoft-com:vml" xmlns:pvml="urn:schemas-microsoft-com:office:powerpoint" xmlns:com="http://schemas.openxmlformats.org/drawingml/2006/compatibility" xmlns:p14="http://schemas.microsoft.com/office/powerpoint/2010/main" xmlns:p15="http://schemas.microsoft.com/office/powerpoint/2012/main" xmlns:ahyp="http://schemas.microsoft.com/office/drawing/2018/hyperlinkcolor" showMasterPhAnim="0" showMasterSp="0">
+  <p:cSld>
+    <p:spTree>
+      <p:nvGrpSpPr>
+        <p:cNvPr id="135" name="Shape 135"/>
+        <p:cNvGrpSpPr/>
+        <p:nvPr/>
+      </p:nvGrpSpPr>
+      <p:grpSpPr>
+        <a:xfrm>
+          <a:off x="0" y="0"/>
+          <a:ext cx="0" cy="0"/>
+          <a:chOff x="0" y="0"/>
+          <a:chExt cx="0" cy="0"/>
+        </a:xfrm>
+      </p:grpSpPr>
+      <p:sp>
+        <p:nvSpPr>
+          <p:cNvPr id="136" name="Google Shape;136;g3ce66e988a9_1_34:notes"/>
+          <p:cNvSpPr txBox="1"/>
+          <p:nvPr>
+            <p:ph idx="1" type="body"/>
+          </p:nvPr>
+        </p:nvSpPr>
+        <p:spPr>
+          <a:xfrm>
+            <a:off x="685800" y="4343400"/>
+            <a:ext cx="5486400" cy="4114800"/>
+          </a:xfrm>
+          <a:prstGeom prst="rect">
+            <a:avLst/>
+          </a:prstGeom>
+        </p:spPr>
+        <p:txBody>
+          <a:bodyPr anchorCtr="0" anchor="t" bIns="91425" lIns="91425" spcFirstLastPara="1" rIns="91425" wrap="square" tIns="91425">
+            <a:noAutofit/>
+          </a:bodyPr>
+          <a:lstStyle/>
+          <a:p>
+            <a:pPr indent="0" lvl="0" marL="0" rtl="0" algn="l">
+              <a:spcBef>
+                <a:spcPts val="0"/>
+              </a:spcBef>
+              <a:spcAft>
+                <a:spcPts val="0"/>
+              </a:spcAft>
+              <a:buNone/>
+            </a:pPr>
+            <a:r>
+              <a:t/>
+            </a:r>
+            <a:endParaRPr/>
+          </a:p>
+        </p:txBody>
+      </p:sp>
+      <p:sp>
+        <p:nvSpPr>
+          <p:cNvPr id="137" name="Google Shape;137;g3ce66e988a9_1_34:notes"/>
+          <p:cNvSpPr/>
+          <p:nvPr>
+            <p:ph idx="2" type="sldImg"/>
+          </p:nvPr>
+        </p:nvSpPr>
+        <p:spPr>
+          <a:xfrm>
+            <a:off x="1143225" y="685800"/>
+            <a:ext cx="4572300" cy="3429000"/>
+          </a:xfrm>
+          <a:custGeom>
+            <a:rect b="b" l="l" r="r" t="t"/>
+            <a:pathLst>
+              <a:path extrusionOk="0" h="120000" w="120000">
+                <a:moveTo>
+                  <a:pt x="0" y="0"/>
+                </a:moveTo>
+                <a:lnTo>
+                  <a:pt x="120000" y="0"/>
+                </a:lnTo>
+                <a:lnTo>
+                  <a:pt x="120000" y="120000"/>
+                </a:lnTo>
+                <a:lnTo>
+                  <a:pt x="0" y="120000"/>
+                </a:lnTo>
+                <a:close/>
+              </a:path>
+            </a:pathLst>
+          </a:custGeom>
+        </p:spPr>
+      </p:sp>
+    </p:spTree>
+  </p:cSld>
+  <p:clrMapOvr>
+    <a:masterClrMapping/>
+  </p:clrMapOvr>
+</p:notes>
+</file>
+
+<file path=ppt/notesSlides/notesSlide11.xml><?xml version="1.0" encoding="utf-8"?>
+<p:notes xmlns:a="http://schemas.openxmlformats.org/drawingml/2006/main" xmlns:r="http://schemas.openxmlformats.org/officeDocument/2006/relationships" xmlns:mc="http://schemas.openxmlformats.org/markup-compatibility/2006" xmlns:mv="urn:schemas-microsoft-com:mac:vml" xmlns:p="http://schemas.openxmlformats.org/presentationml/2006/main" xmlns:c="http://schemas.openxmlformats.org/drawingml/2006/chart" xmlns:dgm="http://schemas.openxmlformats.org/drawingml/2006/diagram" xmlns:o="urn:schemas-microsoft-com:office:office" xmlns:v="urn:schemas-microsoft-com:vml" xmlns:pvml="urn:schemas-microsoft-com:office:powerpoint" xmlns:com="http://schemas.openxmlformats.org/drawingml/2006/compatibility" xmlns:p14="http://schemas.microsoft.com/office/powerpoint/2010/main" xmlns:p15="http://schemas.microsoft.com/office/powerpoint/2012/main" xmlns:ahyp="http://schemas.microsoft.com/office/drawing/2018/hyperlinkcolor" showMasterPhAnim="0" showMasterSp="0">
+  <p:cSld>
+    <p:spTree>
+      <p:nvGrpSpPr>
+        <p:cNvPr id="141" name="Shape 141"/>
+        <p:cNvGrpSpPr/>
+        <p:nvPr/>
+      </p:nvGrpSpPr>
+      <p:grpSpPr>
+        <a:xfrm>
+          <a:off x="0" y="0"/>
+          <a:ext cx="0" cy="0"/>
+          <a:chOff x="0" y="0"/>
+          <a:chExt cx="0" cy="0"/>
+        </a:xfrm>
+      </p:grpSpPr>
+      <p:sp>
+        <p:nvSpPr>
+          <p:cNvPr id="142" name="Google Shape;142;p8:notes"/>
+          <p:cNvSpPr txBox="1"/>
+          <p:nvPr>
+            <p:ph idx="1" type="body"/>
+          </p:nvPr>
+        </p:nvSpPr>
+        <p:spPr>
+          <a:xfrm>
+            <a:off x="685800" y="4343400"/>
+            <a:ext cx="5486400" cy="4114800"/>
+          </a:xfrm>
+          <a:prstGeom prst="rect">
+            <a:avLst/>
+          </a:prstGeom>
+        </p:spPr>
+        <p:txBody>
+          <a:bodyPr anchorCtr="0" anchor="t" bIns="91425" lIns="91425" spcFirstLastPara="1" rIns="91425" wrap="square" tIns="91425">
+            <a:noAutofit/>
+          </a:bodyPr>
+          <a:lstStyle/>
+          <a:p>
+            <a:pPr indent="0" lvl="0" marL="0" rtl="0" algn="l">
+              <a:spcBef>
+                <a:spcPts val="0"/>
+              </a:spcBef>
+              <a:spcAft>
+                <a:spcPts val="0"/>
+              </a:spcAft>
+              <a:buNone/>
+            </a:pPr>
+            <a:r>
+              <a:t/>
+            </a:r>
+            <a:endParaRPr/>
+          </a:p>
+        </p:txBody>
+      </p:sp>
+      <p:sp>
+        <p:nvSpPr>
+          <p:cNvPr id="143" name="Google Shape;143;p8:notes"/>
+          <p:cNvSpPr/>
+          <p:nvPr>
+            <p:ph idx="2" type="sldImg"/>
+          </p:nvPr>
+        </p:nvSpPr>
+        <p:spPr>
+          <a:xfrm>
+            <a:off x="1143225" y="685800"/>
+            <a:ext cx="4572225" cy="3429000"/>
+          </a:xfrm>
+          <a:custGeom>
+            <a:rect b="b" l="l" r="r" t="t"/>
+            <a:pathLst>
+              <a:path extrusionOk="0" h="120000" w="120000">
+                <a:moveTo>
+                  <a:pt x="0" y="0"/>
+                </a:moveTo>
+                <a:lnTo>
+                  <a:pt x="120000" y="0"/>
+                </a:lnTo>
+                <a:lnTo>
+                  <a:pt x="120000" y="120000"/>
+                </a:lnTo>
+                <a:lnTo>
+                  <a:pt x="0" y="120000"/>
+                </a:lnTo>
+                <a:close/>
+              </a:path>
+            </a:pathLst>
+          </a:custGeom>
+        </p:spPr>
+      </p:sp>
+    </p:spTree>
+  </p:cSld>
+  <p:clrMapOvr>
+    <a:masterClrMapping/>
+  </p:clrMapOvr>
+</p:notes>
+</file>
+
 <file path=ppt/notesSlides/notesSlide2.xml><?xml version="1.0" encoding="utf-8"?>
 <p:notes xmlns:a="http://schemas.openxmlformats.org/drawingml/2006/main" xmlns:r="http://schemas.openxmlformats.org/officeDocument/2006/relationships" xmlns:mc="http://schemas.openxmlformats.org/markup-compatibility/2006" xmlns:mv="urn:schemas-microsoft-com:mac:vml" xmlns:p="http://schemas.openxmlformats.org/presentationml/2006/main" xmlns:c="http://schemas.openxmlformats.org/drawingml/2006/chart" xmlns:dgm="http://schemas.openxmlformats.org/drawingml/2006/diagram" xmlns:o="urn:schemas-microsoft-com:office:office" xmlns:v="urn:schemas-microsoft-com:vml" xmlns:pvml="urn:schemas-microsoft-com:office:powerpoint" xmlns:com="http://schemas.openxmlformats.org/drawingml/2006/compatibility" xmlns:p14="http://schemas.microsoft.com/office/powerpoint/2010/main" xmlns:p15="http://schemas.microsoft.com/office/powerpoint/2012/main" xmlns:ahyp="http://schemas.microsoft.com/office/drawing/2018/hyperlinkcolor" showMasterPhAnim="0" showMasterSp="0">
   <p:cSld>
@@ -913,7 +1114,7 @@
       </p:grpSpPr>
       <p:sp>
         <p:nvSpPr>
-          <p:cNvPr id="94" name="Google Shape;94;p3:notes"/>
+          <p:cNvPr id="94" name="Google Shape;94;g3ce66e988a9_1_0:notes"/>
           <p:cNvSpPr txBox="1"/>
           <p:nvPr>
             <p:ph idx="1" type="body"/>
@@ -952,7 +1153,7 @@
       </p:sp>
       <p:sp>
         <p:nvSpPr>
-          <p:cNvPr id="95" name="Google Shape;95;p3:notes"/>
+          <p:cNvPr id="95" name="Google Shape;95;g3ce66e988a9_1_0:notes"/>
           <p:cNvSpPr/>
           <p:nvPr>
             <p:ph idx="2" type="sldImg"/>
@@ -961,7 +1162,7 @@
         <p:spPr>
           <a:xfrm>
             <a:off x="1143225" y="685800"/>
-            <a:ext cx="4572225" cy="3429000"/>
+            <a:ext cx="4572300" cy="3429000"/>
           </a:xfrm>
           <a:custGeom>
             <a:rect b="b" l="l" r="r" t="t"/>
@@ -1012,7 +1213,7 @@
       </p:grpSpPr>
       <p:sp>
         <p:nvSpPr>
-          <p:cNvPr id="100" name="Google Shape;100;p4:notes"/>
+          <p:cNvPr id="100" name="Google Shape;100;p3:notes"/>
           <p:cNvSpPr txBox="1"/>
           <p:nvPr>
             <p:ph idx="1" type="body"/>
@@ -1051,7 +1252,7 @@
       </p:sp>
       <p:sp>
         <p:nvSpPr>
-          <p:cNvPr id="101" name="Google Shape;101;p4:notes"/>
+          <p:cNvPr id="101" name="Google Shape;101;p3:notes"/>
           <p:cNvSpPr/>
           <p:nvPr>
             <p:ph idx="2" type="sldImg"/>
@@ -1111,7 +1312,7 @@
       </p:grpSpPr>
       <p:sp>
         <p:nvSpPr>
-          <p:cNvPr id="106" name="Google Shape;106;p5:notes"/>
+          <p:cNvPr id="106" name="Google Shape;106;g3ce66e988a9_1_9:notes"/>
           <p:cNvSpPr txBox="1"/>
           <p:nvPr>
             <p:ph idx="1" type="body"/>
@@ -1150,7 +1351,7 @@
       </p:sp>
       <p:sp>
         <p:nvSpPr>
-          <p:cNvPr id="107" name="Google Shape;107;p5:notes"/>
+          <p:cNvPr id="107" name="Google Shape;107;g3ce66e988a9_1_9:notes"/>
           <p:cNvSpPr/>
           <p:nvPr>
             <p:ph idx="2" type="sldImg"/>
@@ -1159,7 +1360,7 @@
         <p:spPr>
           <a:xfrm>
             <a:off x="1143225" y="685800"/>
-            <a:ext cx="4572225" cy="3429000"/>
+            <a:ext cx="4572300" cy="3429000"/>
           </a:xfrm>
           <a:custGeom>
             <a:rect b="b" l="l" r="r" t="t"/>
@@ -1210,7 +1411,7 @@
       </p:grpSpPr>
       <p:sp>
         <p:nvSpPr>
-          <p:cNvPr id="112" name="Google Shape;112;p6:notes"/>
+          <p:cNvPr id="112" name="Google Shape;112;p4:notes"/>
           <p:cNvSpPr txBox="1"/>
           <p:nvPr>
             <p:ph idx="1" type="body"/>
@@ -1249,7 +1450,7 @@
       </p:sp>
       <p:sp>
         <p:nvSpPr>
-          <p:cNvPr id="113" name="Google Shape;113;p6:notes"/>
+          <p:cNvPr id="113" name="Google Shape;113;p4:notes"/>
           <p:cNvSpPr/>
           <p:nvPr>
             <p:ph idx="2" type="sldImg"/>
@@ -1309,7 +1510,7 @@
       </p:grpSpPr>
       <p:sp>
         <p:nvSpPr>
-          <p:cNvPr id="118" name="Google Shape;118;p7:notes"/>
+          <p:cNvPr id="118" name="Google Shape;118;p5:notes"/>
           <p:cNvSpPr txBox="1"/>
           <p:nvPr>
             <p:ph idx="1" type="body"/>
@@ -1348,7 +1549,7 @@
       </p:sp>
       <p:sp>
         <p:nvSpPr>
-          <p:cNvPr id="119" name="Google Shape;119;p7:notes"/>
+          <p:cNvPr id="119" name="Google Shape;119;p5:notes"/>
           <p:cNvSpPr/>
           <p:nvPr>
             <p:ph idx="2" type="sldImg"/>
@@ -1408,7 +1609,7 @@
       </p:grpSpPr>
       <p:sp>
         <p:nvSpPr>
-          <p:cNvPr id="124" name="Google Shape;124;p8:notes"/>
+          <p:cNvPr id="124" name="Google Shape;124;p6:notes"/>
           <p:cNvSpPr txBox="1"/>
           <p:nvPr>
             <p:ph idx="1" type="body"/>
@@ -1447,7 +1648,106 @@
       </p:sp>
       <p:sp>
         <p:nvSpPr>
-          <p:cNvPr id="125" name="Google Shape;125;p8:notes"/>
+          <p:cNvPr id="125" name="Google Shape;125;p6:notes"/>
+          <p:cNvSpPr/>
+          <p:nvPr>
+            <p:ph idx="2" type="sldImg"/>
+          </p:nvPr>
+        </p:nvSpPr>
+        <p:spPr>
+          <a:xfrm>
+            <a:off x="1143225" y="685800"/>
+            <a:ext cx="4572225" cy="3429000"/>
+          </a:xfrm>
+          <a:custGeom>
+            <a:rect b="b" l="l" r="r" t="t"/>
+            <a:pathLst>
+              <a:path extrusionOk="0" h="120000" w="120000">
+                <a:moveTo>
+                  <a:pt x="0" y="0"/>
+                </a:moveTo>
+                <a:lnTo>
+                  <a:pt x="120000" y="0"/>
+                </a:lnTo>
+                <a:lnTo>
+                  <a:pt x="120000" y="120000"/>
+                </a:lnTo>
+                <a:lnTo>
+                  <a:pt x="0" y="120000"/>
+                </a:lnTo>
+                <a:close/>
+              </a:path>
+            </a:pathLst>
+          </a:custGeom>
+        </p:spPr>
+      </p:sp>
+    </p:spTree>
+  </p:cSld>
+  <p:clrMapOvr>
+    <a:masterClrMapping/>
+  </p:clrMapOvr>
+</p:notes>
+</file>
+
+<file path=ppt/notesSlides/notesSlide9.xml><?xml version="1.0" encoding="utf-8"?>
+<p:notes xmlns:a="http://schemas.openxmlformats.org/drawingml/2006/main" xmlns:r="http://schemas.openxmlformats.org/officeDocument/2006/relationships" xmlns:mc="http://schemas.openxmlformats.org/markup-compatibility/2006" xmlns:mv="urn:schemas-microsoft-com:mac:vml" xmlns:p="http://schemas.openxmlformats.org/presentationml/2006/main" xmlns:c="http://schemas.openxmlformats.org/drawingml/2006/chart" xmlns:dgm="http://schemas.openxmlformats.org/drawingml/2006/diagram" xmlns:o="urn:schemas-microsoft-com:office:office" xmlns:v="urn:schemas-microsoft-com:vml" xmlns:pvml="urn:schemas-microsoft-com:office:powerpoint" xmlns:com="http://schemas.openxmlformats.org/drawingml/2006/compatibility" xmlns:p14="http://schemas.microsoft.com/office/powerpoint/2010/main" xmlns:p15="http://schemas.microsoft.com/office/powerpoint/2012/main" xmlns:ahyp="http://schemas.microsoft.com/office/drawing/2018/hyperlinkcolor" showMasterPhAnim="0" showMasterSp="0">
+  <p:cSld>
+    <p:spTree>
+      <p:nvGrpSpPr>
+        <p:cNvPr id="129" name="Shape 129"/>
+        <p:cNvGrpSpPr/>
+        <p:nvPr/>
+      </p:nvGrpSpPr>
+      <p:grpSpPr>
+        <a:xfrm>
+          <a:off x="0" y="0"/>
+          <a:ext cx="0" cy="0"/>
+          <a:chOff x="0" y="0"/>
+          <a:chExt cx="0" cy="0"/>
+        </a:xfrm>
+      </p:grpSpPr>
+      <p:sp>
+        <p:nvSpPr>
+          <p:cNvPr id="130" name="Google Shape;130;p7:notes"/>
+          <p:cNvSpPr txBox="1"/>
+          <p:nvPr>
+            <p:ph idx="1" type="body"/>
+          </p:nvPr>
+        </p:nvSpPr>
+        <p:spPr>
+          <a:xfrm>
+            <a:off x="685800" y="4343400"/>
+            <a:ext cx="5486400" cy="4114800"/>
+          </a:xfrm>
+          <a:prstGeom prst="rect">
+            <a:avLst/>
+          </a:prstGeom>
+        </p:spPr>
+        <p:txBody>
+          <a:bodyPr anchorCtr="0" anchor="t" bIns="91425" lIns="91425" spcFirstLastPara="1" rIns="91425" wrap="square" tIns="91425">
+            <a:noAutofit/>
+          </a:bodyPr>
+          <a:lstStyle/>
+          <a:p>
+            <a:pPr indent="0" lvl="0" marL="0" rtl="0" algn="l">
+              <a:spcBef>
+                <a:spcPts val="0"/>
+              </a:spcBef>
+              <a:spcAft>
+                <a:spcPts val="0"/>
+              </a:spcAft>
+              <a:buNone/>
+            </a:pPr>
+            <a:r>
+              <a:t/>
+            </a:r>
+            <a:endParaRPr/>
+          </a:p>
+        </p:txBody>
+      </p:sp>
+      <p:sp>
+        <p:nvSpPr>
+          <p:cNvPr id="131" name="Google Shape;131;p7:notes"/>
           <p:cNvSpPr/>
           <p:nvPr>
             <p:ph idx="2" type="sldImg"/>
@@ -11291,6 +11591,629 @@
 </p:sld>
 </file>
 
+<file path=ppt/slides/slide10.xml><?xml version="1.0" encoding="utf-8"?>
+<p:sld xmlns:a="http://schemas.openxmlformats.org/drawingml/2006/main" xmlns:r="http://schemas.openxmlformats.org/officeDocument/2006/relationships" xmlns:mc="http://schemas.openxmlformats.org/markup-compatibility/2006" xmlns:mv="urn:schemas-microsoft-com:mac:vml" xmlns:p="http://schemas.openxmlformats.org/presentationml/2006/main" xmlns:c="http://schemas.openxmlformats.org/drawingml/2006/chart" xmlns:dgm="http://schemas.openxmlformats.org/drawingml/2006/diagram" xmlns:o="urn:schemas-microsoft-com:office:office" xmlns:v="urn:schemas-microsoft-com:vml" xmlns:pvml="urn:schemas-microsoft-com:office:powerpoint" xmlns:com="http://schemas.openxmlformats.org/drawingml/2006/compatibility" xmlns:p14="http://schemas.microsoft.com/office/powerpoint/2010/main" xmlns:p15="http://schemas.microsoft.com/office/powerpoint/2012/main" xmlns:ahyp="http://schemas.microsoft.com/office/drawing/2018/hyperlinkcolor">
+  <p:cSld>
+    <p:spTree>
+      <p:nvGrpSpPr>
+        <p:cNvPr id="138" name="Shape 138"/>
+        <p:cNvGrpSpPr/>
+        <p:nvPr/>
+      </p:nvGrpSpPr>
+      <p:grpSpPr>
+        <a:xfrm>
+          <a:off x="0" y="0"/>
+          <a:ext cx="0" cy="0"/>
+          <a:chOff x="0" y="0"/>
+          <a:chExt cx="0" cy="0"/>
+        </a:xfrm>
+      </p:grpSpPr>
+      <p:sp>
+        <p:nvSpPr>
+          <p:cNvPr id="139" name="Google Shape;139;g3ce66e988a9_1_34"/>
+          <p:cNvSpPr txBox="1"/>
+          <p:nvPr>
+            <p:ph type="title"/>
+          </p:nvPr>
+        </p:nvSpPr>
+        <p:spPr>
+          <a:xfrm>
+            <a:off x="457200" y="274638"/>
+            <a:ext cx="8229600" cy="1143000"/>
+          </a:xfrm>
+          <a:prstGeom prst="rect">
+            <a:avLst/>
+          </a:prstGeom>
+          <a:noFill/>
+          <a:ln>
+            <a:noFill/>
+          </a:ln>
+        </p:spPr>
+        <p:txBody>
+          <a:bodyPr anchorCtr="0" anchor="ctr" bIns="45700" lIns="91425" spcFirstLastPara="1" rIns="91425" wrap="square" tIns="45700">
+            <a:normAutofit/>
+          </a:bodyPr>
+          <a:lstStyle/>
+          <a:p>
+            <a:pPr indent="0" lvl="0" marL="0" rtl="0" algn="ctr">
+              <a:spcBef>
+                <a:spcPts val="0"/>
+              </a:spcBef>
+              <a:spcAft>
+                <a:spcPts val="0"/>
+              </a:spcAft>
+              <a:buClr>
+                <a:schemeClr val="dk1"/>
+              </a:buClr>
+              <a:buSzPts val="4400"/>
+              <a:buFont typeface="Calibri"/>
+              <a:buNone/>
+            </a:pPr>
+            <a:r>
+              <a:rPr lang="en-US" sz="4400">
+                <a:solidFill>
+                  <a:schemeClr val="dk1"/>
+                </a:solidFill>
+                <a:latin typeface="Calibri"/>
+                <a:ea typeface="Calibri"/>
+                <a:cs typeface="Calibri"/>
+                <a:sym typeface="Calibri"/>
+              </a:rPr>
+              <a:t>Análise dos Resultados</a:t>
+            </a:r>
+            <a:endParaRPr/>
+          </a:p>
+        </p:txBody>
+      </p:sp>
+      <p:sp>
+        <p:nvSpPr>
+          <p:cNvPr id="140" name="Google Shape;140;g3ce66e988a9_1_34"/>
+          <p:cNvSpPr txBox="1"/>
+          <p:nvPr>
+            <p:ph idx="1" type="body"/>
+          </p:nvPr>
+        </p:nvSpPr>
+        <p:spPr>
+          <a:xfrm>
+            <a:off x="457200" y="1600200"/>
+            <a:ext cx="8229600" cy="4526100"/>
+          </a:xfrm>
+          <a:prstGeom prst="rect">
+            <a:avLst/>
+          </a:prstGeom>
+          <a:noFill/>
+          <a:ln>
+            <a:noFill/>
+          </a:ln>
+        </p:spPr>
+        <p:txBody>
+          <a:bodyPr anchorCtr="0" anchor="t" bIns="45700" lIns="91425" spcFirstLastPara="1" rIns="91425" wrap="square" tIns="45700">
+            <a:noAutofit/>
+          </a:bodyPr>
+          <a:lstStyle/>
+          <a:p>
+            <a:pPr indent="0" lvl="0" marL="0" rtl="0" algn="l">
+              <a:lnSpc>
+                <a:spcPct val="115000"/>
+              </a:lnSpc>
+              <a:spcBef>
+                <a:spcPts val="1200"/>
+              </a:spcBef>
+              <a:spcAft>
+                <a:spcPts val="0"/>
+              </a:spcAft>
+              <a:buNone/>
+            </a:pPr>
+            <a:r>
+              <a:rPr lang="en-US" sz="1600">
+                <a:latin typeface="Arial"/>
+                <a:ea typeface="Arial"/>
+                <a:cs typeface="Arial"/>
+                <a:sym typeface="Arial"/>
+              </a:rPr>
+              <a:t>Na exclusão ocorre:</a:t>
+            </a:r>
+            <a:endParaRPr sz="1600">
+              <a:latin typeface="Arial"/>
+              <a:ea typeface="Arial"/>
+              <a:cs typeface="Arial"/>
+              <a:sym typeface="Arial"/>
+            </a:endParaRPr>
+          </a:p>
+          <a:p>
+            <a:pPr indent="-330200" lvl="0" marL="457200" rtl="0" algn="l">
+              <a:lnSpc>
+                <a:spcPct val="115000"/>
+              </a:lnSpc>
+              <a:spcBef>
+                <a:spcPts val="1200"/>
+              </a:spcBef>
+              <a:spcAft>
+                <a:spcPts val="0"/>
+              </a:spcAft>
+              <a:buSzPts val="1600"/>
+              <a:buAutoNum type="arabicPeriod"/>
+            </a:pPr>
+            <a:r>
+              <a:rPr lang="en-US" sz="1600">
+                <a:latin typeface="Arial"/>
+                <a:ea typeface="Arial"/>
+                <a:cs typeface="Arial"/>
+                <a:sym typeface="Arial"/>
+              </a:rPr>
+              <a:t>Busca pelo elemento</a:t>
+            </a:r>
+            <a:endParaRPr sz="1600">
+              <a:latin typeface="Arial"/>
+              <a:ea typeface="Arial"/>
+              <a:cs typeface="Arial"/>
+              <a:sym typeface="Arial"/>
+            </a:endParaRPr>
+          </a:p>
+          <a:p>
+            <a:pPr indent="-330200" lvl="0" marL="457200" rtl="0" algn="l">
+              <a:lnSpc>
+                <a:spcPct val="115000"/>
+              </a:lnSpc>
+              <a:spcBef>
+                <a:spcPts val="0"/>
+              </a:spcBef>
+              <a:spcAft>
+                <a:spcPts val="0"/>
+              </a:spcAft>
+              <a:buSzPts val="1600"/>
+              <a:buAutoNum type="arabicPeriod"/>
+            </a:pPr>
+            <a:r>
+              <a:rPr lang="en-US" sz="1600">
+                <a:latin typeface="Arial"/>
+                <a:ea typeface="Arial"/>
+                <a:cs typeface="Arial"/>
+                <a:sym typeface="Arial"/>
+              </a:rPr>
+              <a:t>Deslocamento dos elementos para manter a ordem</a:t>
+            </a:r>
+            <a:br>
+              <a:rPr lang="en-US" sz="1600">
+                <a:latin typeface="Arial"/>
+                <a:ea typeface="Arial"/>
+                <a:cs typeface="Arial"/>
+                <a:sym typeface="Arial"/>
+              </a:rPr>
+            </a:br>
+            <a:endParaRPr sz="1600">
+              <a:latin typeface="Arial"/>
+              <a:ea typeface="Arial"/>
+              <a:cs typeface="Arial"/>
+              <a:sym typeface="Arial"/>
+            </a:endParaRPr>
+          </a:p>
+          <a:p>
+            <a:pPr indent="0" lvl="0" marL="0" rtl="0" algn="l">
+              <a:lnSpc>
+                <a:spcPct val="115000"/>
+              </a:lnSpc>
+              <a:spcBef>
+                <a:spcPts val="1200"/>
+              </a:spcBef>
+              <a:spcAft>
+                <a:spcPts val="0"/>
+              </a:spcAft>
+              <a:buNone/>
+            </a:pPr>
+            <a:r>
+              <a:rPr lang="en-US" sz="1600">
+                <a:latin typeface="Arial"/>
+                <a:ea typeface="Arial"/>
+                <a:cs typeface="Arial"/>
+                <a:sym typeface="Arial"/>
+              </a:rPr>
+              <a:t>Observações:</a:t>
+            </a:r>
+            <a:endParaRPr sz="1600">
+              <a:latin typeface="Arial"/>
+              <a:ea typeface="Arial"/>
+              <a:cs typeface="Arial"/>
+              <a:sym typeface="Arial"/>
+            </a:endParaRPr>
+          </a:p>
+          <a:p>
+            <a:pPr indent="-330200" lvl="0" marL="457200" rtl="0" algn="l">
+              <a:lnSpc>
+                <a:spcPct val="115000"/>
+              </a:lnSpc>
+              <a:spcBef>
+                <a:spcPts val="1200"/>
+              </a:spcBef>
+              <a:spcAft>
+                <a:spcPts val="0"/>
+              </a:spcAft>
+              <a:buSzPts val="1600"/>
+              <a:buChar char="●"/>
+            </a:pPr>
+            <a:r>
+              <a:rPr lang="en-US" sz="1600">
+                <a:latin typeface="Arial"/>
+                <a:ea typeface="Arial"/>
+                <a:cs typeface="Arial"/>
+                <a:sym typeface="Arial"/>
+              </a:rPr>
+              <a:t>Exclusão crescente e decrescente tiveram tempos semelhantes.</a:t>
+            </a:r>
+            <a:br>
+              <a:rPr lang="en-US" sz="1600">
+                <a:latin typeface="Arial"/>
+                <a:ea typeface="Arial"/>
+                <a:cs typeface="Arial"/>
+                <a:sym typeface="Arial"/>
+              </a:rPr>
+            </a:br>
+            <a:endParaRPr sz="1600">
+              <a:latin typeface="Arial"/>
+              <a:ea typeface="Arial"/>
+              <a:cs typeface="Arial"/>
+              <a:sym typeface="Arial"/>
+            </a:endParaRPr>
+          </a:p>
+          <a:p>
+            <a:pPr indent="-330200" lvl="0" marL="457200" rtl="0" algn="l">
+              <a:lnSpc>
+                <a:spcPct val="115000"/>
+              </a:lnSpc>
+              <a:spcBef>
+                <a:spcPts val="0"/>
+              </a:spcBef>
+              <a:spcAft>
+                <a:spcPts val="0"/>
+              </a:spcAft>
+              <a:buSzPts val="1600"/>
+              <a:buChar char="●"/>
+            </a:pPr>
+            <a:r>
+              <a:rPr lang="en-US" sz="1600">
+                <a:latin typeface="Arial"/>
+                <a:ea typeface="Arial"/>
+                <a:cs typeface="Arial"/>
+                <a:sym typeface="Arial"/>
+              </a:rPr>
+              <a:t>Exclusão aleatória apresentou tempo maior.</a:t>
+            </a:r>
+            <a:br>
+              <a:rPr lang="en-US" sz="1600">
+                <a:latin typeface="Arial"/>
+                <a:ea typeface="Arial"/>
+                <a:cs typeface="Arial"/>
+                <a:sym typeface="Arial"/>
+              </a:rPr>
+            </a:br>
+            <a:endParaRPr sz="1600">
+              <a:latin typeface="Arial"/>
+              <a:ea typeface="Arial"/>
+              <a:cs typeface="Arial"/>
+              <a:sym typeface="Arial"/>
+            </a:endParaRPr>
+          </a:p>
+          <a:p>
+            <a:pPr indent="0" lvl="0" marL="0" rtl="0" algn="l">
+              <a:lnSpc>
+                <a:spcPct val="115000"/>
+              </a:lnSpc>
+              <a:spcBef>
+                <a:spcPts val="1200"/>
+              </a:spcBef>
+              <a:spcAft>
+                <a:spcPts val="1200"/>
+              </a:spcAft>
+              <a:buNone/>
+            </a:pPr>
+            <a:r>
+              <a:rPr lang="en-US" sz="1600">
+                <a:latin typeface="Arial"/>
+                <a:ea typeface="Arial"/>
+                <a:cs typeface="Arial"/>
+                <a:sym typeface="Arial"/>
+              </a:rPr>
+              <a:t>Isso ocorre porque a posição do elemento removido pode exigir deslocamentos maiores dentro do arranjo.</a:t>
+            </a:r>
+            <a:endParaRPr sz="2500">
+              <a:latin typeface="Arial"/>
+              <a:ea typeface="Arial"/>
+              <a:cs typeface="Arial"/>
+              <a:sym typeface="Arial"/>
+            </a:endParaRPr>
+          </a:p>
+        </p:txBody>
+      </p:sp>
+    </p:spTree>
+  </p:cSld>
+  <p:clrMapOvr>
+    <a:masterClrMapping/>
+  </p:clrMapOvr>
+</p:sld>
+</file>
+
+<file path=ppt/slides/slide11.xml><?xml version="1.0" encoding="utf-8"?>
+<p:sld xmlns:a="http://schemas.openxmlformats.org/drawingml/2006/main" xmlns:r="http://schemas.openxmlformats.org/officeDocument/2006/relationships" xmlns:mc="http://schemas.openxmlformats.org/markup-compatibility/2006" xmlns:mv="urn:schemas-microsoft-com:mac:vml" xmlns:p="http://schemas.openxmlformats.org/presentationml/2006/main" xmlns:c="http://schemas.openxmlformats.org/drawingml/2006/chart" xmlns:dgm="http://schemas.openxmlformats.org/drawingml/2006/diagram" xmlns:o="urn:schemas-microsoft-com:office:office" xmlns:v="urn:schemas-microsoft-com:vml" xmlns:pvml="urn:schemas-microsoft-com:office:powerpoint" xmlns:com="http://schemas.openxmlformats.org/drawingml/2006/compatibility" xmlns:p14="http://schemas.microsoft.com/office/powerpoint/2010/main" xmlns:p15="http://schemas.microsoft.com/office/powerpoint/2012/main" xmlns:ahyp="http://schemas.microsoft.com/office/drawing/2018/hyperlinkcolor">
+  <p:cSld>
+    <p:spTree>
+      <p:nvGrpSpPr>
+        <p:cNvPr id="144" name="Shape 144"/>
+        <p:cNvGrpSpPr/>
+        <p:nvPr/>
+      </p:nvGrpSpPr>
+      <p:grpSpPr>
+        <a:xfrm>
+          <a:off x="0" y="0"/>
+          <a:ext cx="0" cy="0"/>
+          <a:chOff x="0" y="0"/>
+          <a:chExt cx="0" cy="0"/>
+        </a:xfrm>
+      </p:grpSpPr>
+      <p:sp>
+        <p:nvSpPr>
+          <p:cNvPr id="145" name="Google Shape;145;p8"/>
+          <p:cNvSpPr txBox="1"/>
+          <p:nvPr>
+            <p:ph type="title"/>
+          </p:nvPr>
+        </p:nvSpPr>
+        <p:spPr>
+          <a:xfrm>
+            <a:off x="457200" y="274638"/>
+            <a:ext cx="8229600" cy="1143000"/>
+          </a:xfrm>
+          <a:prstGeom prst="rect">
+            <a:avLst/>
+          </a:prstGeom>
+          <a:noFill/>
+          <a:ln>
+            <a:noFill/>
+          </a:ln>
+        </p:spPr>
+        <p:txBody>
+          <a:bodyPr anchorCtr="0" anchor="ctr" bIns="45700" lIns="91425" spcFirstLastPara="1" rIns="91425" wrap="square" tIns="45700">
+            <a:normAutofit/>
+          </a:bodyPr>
+          <a:lstStyle/>
+          <a:p>
+            <a:pPr indent="0" lvl="0" marL="0" rtl="0" algn="ctr">
+              <a:spcBef>
+                <a:spcPts val="0"/>
+              </a:spcBef>
+              <a:spcAft>
+                <a:spcPts val="0"/>
+              </a:spcAft>
+              <a:buClr>
+                <a:schemeClr val="dk1"/>
+              </a:buClr>
+              <a:buSzPts val="4400"/>
+              <a:buFont typeface="Calibri"/>
+              <a:buNone/>
+            </a:pPr>
+            <a:r>
+              <a:rPr lang="en-US" sz="4400">
+                <a:solidFill>
+                  <a:schemeClr val="dk1"/>
+                </a:solidFill>
+                <a:latin typeface="Calibri"/>
+                <a:ea typeface="Calibri"/>
+                <a:cs typeface="Calibri"/>
+                <a:sym typeface="Calibri"/>
+              </a:rPr>
+              <a:t>Conclusão</a:t>
+            </a:r>
+            <a:endParaRPr/>
+          </a:p>
+        </p:txBody>
+      </p:sp>
+      <p:sp>
+        <p:nvSpPr>
+          <p:cNvPr id="146" name="Google Shape;146;p8"/>
+          <p:cNvSpPr txBox="1"/>
+          <p:nvPr>
+            <p:ph idx="1" type="body"/>
+          </p:nvPr>
+        </p:nvSpPr>
+        <p:spPr>
+          <a:xfrm>
+            <a:off x="457200" y="1600200"/>
+            <a:ext cx="8229600" cy="4525963"/>
+          </a:xfrm>
+          <a:prstGeom prst="rect">
+            <a:avLst/>
+          </a:prstGeom>
+          <a:noFill/>
+          <a:ln>
+            <a:noFill/>
+          </a:ln>
+        </p:spPr>
+        <p:txBody>
+          <a:bodyPr anchorCtr="0" anchor="t" bIns="45700" lIns="91425" spcFirstLastPara="1" rIns="91425" wrap="square" tIns="45700">
+            <a:noAutofit/>
+          </a:bodyPr>
+          <a:lstStyle/>
+          <a:p>
+            <a:pPr indent="0" lvl="0" marL="0" rtl="0" algn="l">
+              <a:lnSpc>
+                <a:spcPct val="115000"/>
+              </a:lnSpc>
+              <a:spcBef>
+                <a:spcPts val="1200"/>
+              </a:spcBef>
+              <a:spcAft>
+                <a:spcPts val="0"/>
+              </a:spcAft>
+              <a:buNone/>
+            </a:pPr>
+            <a:r>
+              <a:rPr lang="en-US" sz="1800">
+                <a:latin typeface="Arial"/>
+                <a:ea typeface="Arial"/>
+                <a:cs typeface="Arial"/>
+                <a:sym typeface="Arial"/>
+              </a:rPr>
+              <a:t>Os experimentos permitiram analisar o comportamento da estrutura ArranjoOrdenado nas operações de inserção e exclusão.</a:t>
+            </a:r>
+            <a:endParaRPr sz="1800">
+              <a:latin typeface="Arial"/>
+              <a:ea typeface="Arial"/>
+              <a:cs typeface="Arial"/>
+              <a:sym typeface="Arial"/>
+            </a:endParaRPr>
+          </a:p>
+          <a:p>
+            <a:pPr indent="-342900" lvl="0" marL="457200" rtl="0" algn="l">
+              <a:lnSpc>
+                <a:spcPct val="115000"/>
+              </a:lnSpc>
+              <a:spcBef>
+                <a:spcPts val="1200"/>
+              </a:spcBef>
+              <a:spcAft>
+                <a:spcPts val="0"/>
+              </a:spcAft>
+              <a:buSzPts val="1800"/>
+              <a:buChar char="●"/>
+            </a:pPr>
+            <a:r>
+              <a:rPr lang="en-US" sz="1800">
+                <a:latin typeface="Arial"/>
+                <a:ea typeface="Arial"/>
+                <a:cs typeface="Arial"/>
+                <a:sym typeface="Arial"/>
+              </a:rPr>
+              <a:t>Ambas as operações podem exigir deslocamento de elementos no arranjo.</a:t>
+            </a:r>
+            <a:br>
+              <a:rPr lang="en-US" sz="1800">
+                <a:latin typeface="Arial"/>
+                <a:ea typeface="Arial"/>
+                <a:cs typeface="Arial"/>
+                <a:sym typeface="Arial"/>
+              </a:rPr>
+            </a:br>
+            <a:endParaRPr sz="1800">
+              <a:latin typeface="Arial"/>
+              <a:ea typeface="Arial"/>
+              <a:cs typeface="Arial"/>
+              <a:sym typeface="Arial"/>
+            </a:endParaRPr>
+          </a:p>
+          <a:p>
+            <a:pPr indent="-342900" lvl="0" marL="457200" rtl="0" algn="l">
+              <a:lnSpc>
+                <a:spcPct val="115000"/>
+              </a:lnSpc>
+              <a:spcBef>
+                <a:spcPts val="0"/>
+              </a:spcBef>
+              <a:spcAft>
+                <a:spcPts val="0"/>
+              </a:spcAft>
+              <a:buSzPts val="1800"/>
+              <a:buChar char="●"/>
+            </a:pPr>
+            <a:r>
+              <a:rPr lang="en-US" sz="1800">
+                <a:latin typeface="Arial"/>
+                <a:ea typeface="Arial"/>
+                <a:cs typeface="Arial"/>
+                <a:sym typeface="Arial"/>
+              </a:rPr>
+              <a:t>O custo dessas operações cresce conforme o tamanho da estrutura.</a:t>
+            </a:r>
+            <a:br>
+              <a:rPr lang="en-US" sz="1800">
+                <a:latin typeface="Arial"/>
+                <a:ea typeface="Arial"/>
+                <a:cs typeface="Arial"/>
+                <a:sym typeface="Arial"/>
+              </a:rPr>
+            </a:br>
+            <a:endParaRPr sz="1800">
+              <a:latin typeface="Arial"/>
+              <a:ea typeface="Arial"/>
+              <a:cs typeface="Arial"/>
+              <a:sym typeface="Arial"/>
+            </a:endParaRPr>
+          </a:p>
+          <a:p>
+            <a:pPr indent="-342900" lvl="0" marL="457200" rtl="0" algn="l">
+              <a:lnSpc>
+                <a:spcPct val="115000"/>
+              </a:lnSpc>
+              <a:spcBef>
+                <a:spcPts val="0"/>
+              </a:spcBef>
+              <a:spcAft>
+                <a:spcPts val="0"/>
+              </a:spcAft>
+              <a:buSzPts val="1800"/>
+              <a:buChar char="●"/>
+            </a:pPr>
+            <a:r>
+              <a:rPr lang="en-US" sz="1800">
+                <a:latin typeface="Arial"/>
+                <a:ea typeface="Arial"/>
+                <a:cs typeface="Arial"/>
+                <a:sym typeface="Arial"/>
+              </a:rPr>
+              <a:t>O desempenho pode variar dependendo da posição onde a operação ocorre.</a:t>
+            </a:r>
+            <a:br>
+              <a:rPr lang="en-US" sz="1800">
+                <a:latin typeface="Arial"/>
+                <a:ea typeface="Arial"/>
+                <a:cs typeface="Arial"/>
+                <a:sym typeface="Arial"/>
+              </a:rPr>
+            </a:br>
+            <a:endParaRPr sz="1800">
+              <a:latin typeface="Arial"/>
+              <a:ea typeface="Arial"/>
+              <a:cs typeface="Arial"/>
+              <a:sym typeface="Arial"/>
+            </a:endParaRPr>
+          </a:p>
+          <a:p>
+            <a:pPr indent="0" lvl="0" marL="0" rtl="0" algn="l">
+              <a:lnSpc>
+                <a:spcPct val="115000"/>
+              </a:lnSpc>
+              <a:spcBef>
+                <a:spcPts val="1200"/>
+              </a:spcBef>
+              <a:spcAft>
+                <a:spcPts val="1200"/>
+              </a:spcAft>
+              <a:buNone/>
+            </a:pPr>
+            <a:r>
+              <a:rPr lang="en-US" sz="1800">
+                <a:latin typeface="Arial"/>
+                <a:ea typeface="Arial"/>
+                <a:cs typeface="Arial"/>
+                <a:sym typeface="Arial"/>
+              </a:rPr>
+              <a:t>Esse tipo de estrutura é simples de implementar, mas pode apresentar custos elevados para inserções e exclusões em grandes conjuntos de dados.</a:t>
+            </a:r>
+            <a:endParaRPr>
+              <a:latin typeface="Arial"/>
+              <a:ea typeface="Arial"/>
+              <a:cs typeface="Arial"/>
+              <a:sym typeface="Arial"/>
+            </a:endParaRPr>
+          </a:p>
+        </p:txBody>
+      </p:sp>
+    </p:spTree>
+  </p:cSld>
+  <p:clrMapOvr>
+    <a:masterClrMapping/>
+  </p:clrMapOvr>
+</p:sld>
+</file>
+
 <file path=ppt/slides/slide2.xml><?xml version="1.0" encoding="utf-8"?>
 <p:sld xmlns:a="http://schemas.openxmlformats.org/drawingml/2006/main" xmlns:r="http://schemas.openxmlformats.org/officeDocument/2006/relationships" xmlns:mc="http://schemas.openxmlformats.org/markup-compatibility/2006" xmlns:mv="urn:schemas-microsoft-com:mac:vml" xmlns:p="http://schemas.openxmlformats.org/presentationml/2006/main" xmlns:c="http://schemas.openxmlformats.org/drawingml/2006/chart" xmlns:dgm="http://schemas.openxmlformats.org/drawingml/2006/diagram" xmlns:o="urn:schemas-microsoft-com:office:office" xmlns:v="urn:schemas-microsoft-com:vml" xmlns:pvml="urn:schemas-microsoft-com:office:powerpoint" xmlns:com="http://schemas.openxmlformats.org/drawingml/2006/compatibility" xmlns:p14="http://schemas.microsoft.com/office/powerpoint/2010/main" xmlns:p15="http://schemas.microsoft.com/office/powerpoint/2012/main" xmlns:ahyp="http://schemas.microsoft.com/office/drawing/2018/hyperlinkcolor">
   <p:cSld>
@@ -11331,7 +12254,7 @@
         </p:spPr>
         <p:txBody>
           <a:bodyPr anchorCtr="0" anchor="ctr" bIns="45700" lIns="91425" spcFirstLastPara="1" rIns="91425" wrap="square" tIns="45700">
-            <a:normAutofit fontScale="90000"/>
+            <a:normAutofit/>
           </a:bodyPr>
           <a:lstStyle/>
           <a:p>
@@ -11345,25 +12268,13 @@
               <a:buClr>
                 <a:schemeClr val="dk1"/>
               </a:buClr>
-              <a:buSzPct val="100000"/>
+              <a:buSzPts val="4400"/>
               <a:buFont typeface="Calibri"/>
               <a:buNone/>
             </a:pPr>
             <a:r>
-              <a:rPr lang="en-US" sz="4400">
-                <a:solidFill>
-                  <a:schemeClr val="dk1"/>
-                </a:solidFill>
-                <a:latin typeface="Calibri"/>
-                <a:ea typeface="Calibri"/>
-                <a:cs typeface="Calibri"/>
-                <a:sym typeface="Calibri"/>
-              </a:rPr>
-              <a:t>Estrutura de Dados: </a:t>
-            </a:r>
-            <a:r>
               <a:rPr lang="en-US"/>
-              <a:t>Arranjo Ordenado</a:t>
+              <a:t>Objetivo</a:t>
             </a:r>
             <a:endParaRPr/>
           </a:p>
@@ -11380,7 +12291,7 @@
         <p:spPr>
           <a:xfrm>
             <a:off x="457200" y="1600200"/>
-            <a:ext cx="8229600" cy="4525963"/>
+            <a:ext cx="8229600" cy="4623000"/>
           </a:xfrm>
           <a:prstGeom prst="rect">
             <a:avLst/>
@@ -11396,9 +12307,12 @@
           </a:bodyPr>
           <a:lstStyle/>
           <a:p>
-            <a:pPr indent="0" lvl="0" marL="0" rtl="0" algn="l">
-              <a:spcBef>
-                <a:spcPts val="0"/>
+            <a:pPr indent="0" lvl="0" marL="0" rtl="0" algn="just">
+              <a:lnSpc>
+                <a:spcPct val="115000"/>
+              </a:lnSpc>
+              <a:spcBef>
+                <a:spcPts val="1200"/>
               </a:spcBef>
               <a:spcAft>
                 <a:spcPts val="0"/>
@@ -11406,66 +12320,36 @@
               <a:buNone/>
             </a:pPr>
             <a:r>
-              <a:rPr lang="en-US" sz="2500">
-                <a:solidFill>
-                  <a:schemeClr val="dk1"/>
-                </a:solidFill>
-                <a:latin typeface="Calibri"/>
-                <a:ea typeface="Calibri"/>
-                <a:cs typeface="Calibri"/>
-                <a:sym typeface="Calibri"/>
+              <a:rPr lang="en-US" sz="2200">
+                <a:latin typeface="Arial"/>
+                <a:ea typeface="Arial"/>
+                <a:cs typeface="Arial"/>
+                <a:sym typeface="Arial"/>
               </a:rPr>
-              <a:t>Um </a:t>
+              <a:t>Implementar a estrutura de dados ArranjoOrdenado capaz de manter números inteiros em ordem crescente e ordem decrescente.</a:t>
             </a:r>
-            <a:r>
-              <a:rPr lang="en-US" sz="2500"/>
-              <a:t>arranjo ordenado</a:t>
-            </a:r>
-            <a:r>
-              <a:rPr lang="en-US" sz="2500">
-                <a:solidFill>
-                  <a:schemeClr val="dk1"/>
-                </a:solidFill>
-                <a:latin typeface="Calibri"/>
-                <a:ea typeface="Calibri"/>
-                <a:cs typeface="Calibri"/>
-                <a:sym typeface="Calibri"/>
+            <a:br>
+              <a:rPr b="1" lang="en-US" sz="2200">
+                <a:latin typeface="Arial"/>
+                <a:ea typeface="Arial"/>
+                <a:cs typeface="Arial"/>
+                <a:sym typeface="Arial"/>
               </a:rPr>
-              <a:t> mantém os seus elementos sempre em ordem.</a:t>
-            </a:r>
-            <a:endParaRPr sz="2500"/>
-          </a:p>
-          <a:p>
-            <a:pPr indent="-139700" lvl="0" marL="342900" rtl="0" algn="l">
-              <a:spcBef>
-                <a:spcPts val="640"/>
-              </a:spcBef>
-              <a:spcAft>
-                <a:spcPts val="0"/>
-              </a:spcAft>
-              <a:buClr>
-                <a:schemeClr val="dk1"/>
-              </a:buClr>
-              <a:buSzPts val="3200"/>
-              <a:buNone/>
-            </a:pPr>
-            <a:r>
-              <a:t/>
-            </a:r>
-            <a:endParaRPr sz="2500">
-              <a:solidFill>
-                <a:schemeClr val="dk1"/>
-              </a:solidFill>
-              <a:latin typeface="Calibri"/>
-              <a:ea typeface="Calibri"/>
-              <a:cs typeface="Calibri"/>
-              <a:sym typeface="Calibri"/>
+            </a:br>
+            <a:endParaRPr b="1" sz="2200">
+              <a:latin typeface="Arial"/>
+              <a:ea typeface="Arial"/>
+              <a:cs typeface="Arial"/>
+              <a:sym typeface="Arial"/>
             </a:endParaRPr>
           </a:p>
           <a:p>
-            <a:pPr indent="0" lvl="0" marL="0" rtl="0" algn="l">
-              <a:spcBef>
-                <a:spcPts val="640"/>
+            <a:pPr indent="0" lvl="0" marL="0" rtl="0" algn="just">
+              <a:lnSpc>
+                <a:spcPct val="115000"/>
+              </a:lnSpc>
+              <a:spcBef>
+                <a:spcPts val="1200"/>
               </a:spcBef>
               <a:spcAft>
                 <a:spcPts val="0"/>
@@ -11473,193 +12357,174 @@
               <a:buNone/>
             </a:pPr>
             <a:r>
-              <a:rPr lang="en-US" sz="2500">
-                <a:solidFill>
-                  <a:schemeClr val="dk1"/>
-                </a:solidFill>
-                <a:latin typeface="Calibri"/>
-                <a:ea typeface="Calibri"/>
-                <a:cs typeface="Calibri"/>
-                <a:sym typeface="Calibri"/>
+              <a:rPr lang="en-US" sz="2200">
+                <a:latin typeface="Arial"/>
+                <a:ea typeface="Arial"/>
+                <a:cs typeface="Arial"/>
+                <a:sym typeface="Arial"/>
               </a:rPr>
-              <a:t>Características:</a:t>
-            </a:r>
-            <a:endParaRPr sz="2500"/>
-          </a:p>
-          <a:p>
-            <a:pPr indent="-298450" lvl="0" marL="342900" rtl="0" algn="l">
-              <a:spcBef>
-                <a:spcPts val="640"/>
-              </a:spcBef>
-              <a:spcAft>
-                <a:spcPts val="0"/>
-              </a:spcAft>
-              <a:buClr>
-                <a:schemeClr val="dk1"/>
-              </a:buClr>
-              <a:buSzPts val="2500"/>
-              <a:buChar char="•"/>
-            </a:pPr>
-            <a:r>
-              <a:rPr lang="en-US" sz="2500">
-                <a:solidFill>
-                  <a:schemeClr val="dk1"/>
-                </a:solidFill>
-                <a:latin typeface="Calibri"/>
-                <a:ea typeface="Calibri"/>
-                <a:cs typeface="Calibri"/>
-                <a:sym typeface="Calibri"/>
-              </a:rPr>
-              <a:t>Armazena números inteiros</a:t>
-            </a:r>
-            <a:endParaRPr sz="2500"/>
-          </a:p>
-          <a:p>
-            <a:pPr indent="-298450" lvl="0" marL="342900" rtl="0" algn="l">
-              <a:spcBef>
-                <a:spcPts val="640"/>
-              </a:spcBef>
-              <a:spcAft>
-                <a:spcPts val="0"/>
-              </a:spcAft>
-              <a:buClr>
-                <a:schemeClr val="dk1"/>
-              </a:buClr>
-              <a:buSzPts val="2500"/>
-              <a:buChar char="•"/>
-            </a:pPr>
-            <a:r>
-              <a:rPr lang="en-US" sz="2500">
-                <a:solidFill>
-                  <a:schemeClr val="dk1"/>
-                </a:solidFill>
-                <a:latin typeface="Calibri"/>
-                <a:ea typeface="Calibri"/>
-                <a:cs typeface="Calibri"/>
-                <a:sym typeface="Calibri"/>
-              </a:rPr>
-              <a:t>Mantém ordenação automática</a:t>
-            </a:r>
-            <a:endParaRPr sz="2500"/>
-          </a:p>
-          <a:p>
-            <a:pPr indent="-298450" lvl="0" marL="342900" rtl="0" algn="l">
-              <a:spcBef>
-                <a:spcPts val="640"/>
-              </a:spcBef>
-              <a:spcAft>
-                <a:spcPts val="0"/>
-              </a:spcAft>
-              <a:buClr>
-                <a:schemeClr val="dk1"/>
-              </a:buClr>
-              <a:buSzPts val="2500"/>
-              <a:buChar char="•"/>
-            </a:pPr>
-            <a:r>
-              <a:rPr lang="en-US" sz="2500">
-                <a:solidFill>
-                  <a:schemeClr val="dk1"/>
-                </a:solidFill>
-                <a:latin typeface="Calibri"/>
-                <a:ea typeface="Calibri"/>
-                <a:cs typeface="Calibri"/>
-                <a:sym typeface="Calibri"/>
-              </a:rPr>
-              <a:t>I</a:t>
+              <a:t>Além disso, realizar um experimento científico para medir o desempenho das operações de inserção e e</a:t>
             </a:r>
             <a:r>
-              <a:rPr lang="en-US" sz="2500">
-                <a:solidFill>
-                  <a:schemeClr val="dk1"/>
-                </a:solidFill>
-                <a:latin typeface="Calibri"/>
-                <a:ea typeface="Calibri"/>
-                <a:cs typeface="Calibri"/>
-                <a:sym typeface="Calibri"/>
+              <a:rPr lang="en-US" sz="2200">
+                <a:latin typeface="Arial"/>
+                <a:ea typeface="Arial"/>
+                <a:cs typeface="Arial"/>
+                <a:sym typeface="Arial"/>
               </a:rPr>
-              <a:t>nserção desloca elementos</a:t>
+              <a:t>x</a:t>
             </a:r>
-            <a:endParaRPr sz="2500"/>
-          </a:p>
-          <a:p>
-            <a:pPr indent="-298450" lvl="0" marL="342900" rtl="0" algn="l">
-              <a:spcBef>
-                <a:spcPts val="640"/>
-              </a:spcBef>
-              <a:spcAft>
-                <a:spcPts val="0"/>
-              </a:spcAft>
-              <a:buClr>
-                <a:schemeClr val="dk1"/>
-              </a:buClr>
-              <a:buSzPts val="2500"/>
-              <a:buChar char="•"/>
-            </a:pPr>
             <a:r>
-              <a:rPr lang="en-US" sz="2500">
-                <a:solidFill>
-                  <a:schemeClr val="dk1"/>
-                </a:solidFill>
-                <a:latin typeface="Calibri"/>
-                <a:ea typeface="Calibri"/>
-                <a:cs typeface="Calibri"/>
-                <a:sym typeface="Calibri"/>
+              <a:rPr lang="en-US" sz="2200">
+                <a:latin typeface="Arial"/>
+                <a:ea typeface="Arial"/>
+                <a:cs typeface="Arial"/>
+                <a:sym typeface="Arial"/>
               </a:rPr>
-              <a:t>Exclusão também exige deslocamento</a:t>
+              <a:t>clusão</a:t>
             </a:r>
-            <a:endParaRPr sz="2500"/>
-          </a:p>
-          <a:p>
-            <a:pPr indent="-139700" lvl="0" marL="342900" rtl="0" algn="l">
-              <a:spcBef>
-                <a:spcPts val="640"/>
-              </a:spcBef>
-              <a:spcAft>
-                <a:spcPts val="0"/>
-              </a:spcAft>
-              <a:buClr>
-                <a:schemeClr val="dk1"/>
-              </a:buClr>
-              <a:buSzPts val="3200"/>
-              <a:buNone/>
-            </a:pPr>
-            <a:r>
-              <a:t/>
-            </a:r>
-            <a:endParaRPr sz="2500">
-              <a:solidFill>
-                <a:schemeClr val="dk1"/>
-              </a:solidFill>
-              <a:latin typeface="Calibri"/>
-              <a:ea typeface="Calibri"/>
-              <a:cs typeface="Calibri"/>
-              <a:sym typeface="Calibri"/>
+            <a:br>
+              <a:rPr b="1" lang="en-US" sz="2200">
+                <a:latin typeface="Arial"/>
+                <a:ea typeface="Arial"/>
+                <a:cs typeface="Arial"/>
+                <a:sym typeface="Arial"/>
+              </a:rPr>
+            </a:br>
+            <a:endParaRPr b="1" sz="2200">
+              <a:latin typeface="Arial"/>
+              <a:ea typeface="Arial"/>
+              <a:cs typeface="Arial"/>
+              <a:sym typeface="Arial"/>
             </a:endParaRPr>
           </a:p>
           <a:p>
-            <a:pPr indent="0" lvl="0" marL="0" rtl="0" algn="l">
-              <a:spcBef>
-                <a:spcPts val="640"/>
-              </a:spcBef>
-              <a:spcAft>
-                <a:spcPts val="0"/>
-              </a:spcAft>
+            <a:pPr indent="0" lvl="0" marL="0" rtl="0" algn="just">
+              <a:lnSpc>
+                <a:spcPct val="115000"/>
+              </a:lnSpc>
+              <a:spcBef>
+                <a:spcPts val="1200"/>
+              </a:spcBef>
+              <a:spcAft>
+                <a:spcPts val="0"/>
+              </a:spcAft>
+              <a:buClr>
+                <a:schemeClr val="dk1"/>
+              </a:buClr>
+              <a:buSzPts val="1100"/>
+              <a:buFont typeface="Arial"/>
               <a:buNone/>
             </a:pPr>
             <a:r>
-              <a:rPr lang="en-US" sz="2500">
-                <a:solidFill>
-                  <a:schemeClr val="dk1"/>
-                </a:solidFill>
-                <a:latin typeface="Calibri"/>
-                <a:ea typeface="Calibri"/>
-                <a:cs typeface="Calibri"/>
-                <a:sym typeface="Calibri"/>
+              <a:rPr lang="en-US" sz="2200">
+                <a:latin typeface="Arial"/>
+                <a:ea typeface="Arial"/>
+                <a:cs typeface="Arial"/>
+                <a:sym typeface="Arial"/>
               </a:rPr>
-              <a:t>Capacidade usada no experimento: 100.000 elementos</a:t>
+              <a:t>Para diferentes formas de entrada de dados:</a:t>
             </a:r>
-            <a:endParaRPr sz="2500"/>
+            <a:endParaRPr sz="2200">
+              <a:latin typeface="Arial"/>
+              <a:ea typeface="Arial"/>
+              <a:cs typeface="Arial"/>
+              <a:sym typeface="Arial"/>
+            </a:endParaRPr>
+          </a:p>
+          <a:p>
+            <a:pPr indent="-368300" lvl="0" marL="457200" rtl="0" algn="just">
+              <a:lnSpc>
+                <a:spcPct val="115000"/>
+              </a:lnSpc>
+              <a:spcBef>
+                <a:spcPts val="1200"/>
+              </a:spcBef>
+              <a:spcAft>
+                <a:spcPts val="0"/>
+              </a:spcAft>
+              <a:buSzPts val="2200"/>
+              <a:buChar char="●"/>
+            </a:pPr>
+            <a:r>
+              <a:rPr lang="en-US" sz="2200">
+                <a:latin typeface="Arial"/>
+                <a:ea typeface="Arial"/>
+                <a:cs typeface="Arial"/>
+                <a:sym typeface="Arial"/>
+              </a:rPr>
+              <a:t>crescente</a:t>
+            </a:r>
+            <a:endParaRPr sz="2200">
+              <a:latin typeface="Arial"/>
+              <a:ea typeface="Arial"/>
+              <a:cs typeface="Arial"/>
+              <a:sym typeface="Arial"/>
+            </a:endParaRPr>
+          </a:p>
+          <a:p>
+            <a:pPr indent="-368300" lvl="0" marL="457200" rtl="0" algn="just">
+              <a:lnSpc>
+                <a:spcPct val="115000"/>
+              </a:lnSpc>
+              <a:spcBef>
+                <a:spcPts val="0"/>
+              </a:spcBef>
+              <a:spcAft>
+                <a:spcPts val="0"/>
+              </a:spcAft>
+              <a:buSzPts val="2200"/>
+              <a:buChar char="●"/>
+            </a:pPr>
+            <a:r>
+              <a:rPr lang="en-US" sz="2200">
+                <a:latin typeface="Arial"/>
+                <a:ea typeface="Arial"/>
+                <a:cs typeface="Arial"/>
+                <a:sym typeface="Arial"/>
+              </a:rPr>
+              <a:t>decrescente</a:t>
+            </a:r>
+            <a:endParaRPr sz="2200">
+              <a:latin typeface="Arial"/>
+              <a:ea typeface="Arial"/>
+              <a:cs typeface="Arial"/>
+              <a:sym typeface="Arial"/>
+            </a:endParaRPr>
+          </a:p>
+          <a:p>
+            <a:pPr indent="-368300" lvl="0" marL="457200" rtl="0" algn="just">
+              <a:lnSpc>
+                <a:spcPct val="115000"/>
+              </a:lnSpc>
+              <a:spcBef>
+                <a:spcPts val="0"/>
+              </a:spcBef>
+              <a:spcAft>
+                <a:spcPts val="0"/>
+              </a:spcAft>
+              <a:buSzPts val="2200"/>
+              <a:buChar char="●"/>
+            </a:pPr>
+            <a:r>
+              <a:rPr lang="en-US" sz="2200">
+                <a:latin typeface="Arial"/>
+                <a:ea typeface="Arial"/>
+                <a:cs typeface="Arial"/>
+                <a:sym typeface="Arial"/>
+              </a:rPr>
+              <a:t>aleatóri</a:t>
+            </a:r>
+            <a:r>
+              <a:rPr lang="en-US" sz="2200">
+                <a:latin typeface="Arial"/>
+                <a:ea typeface="Arial"/>
+                <a:cs typeface="Arial"/>
+                <a:sym typeface="Arial"/>
+              </a:rPr>
+              <a:t>a</a:t>
+            </a:r>
+            <a:endParaRPr sz="2200"/>
           </a:p>
         </p:txBody>
       </p:sp>
@@ -11690,7 +12555,7 @@
       </p:grpSpPr>
       <p:sp>
         <p:nvSpPr>
-          <p:cNvPr id="97" name="Google Shape;97;p3"/>
+          <p:cNvPr id="97" name="Google Shape;97;g3ce66e988a9_1_0"/>
           <p:cNvSpPr txBox="1"/>
           <p:nvPr>
             <p:ph type="title"/>
@@ -11711,7 +12576,7 @@
         </p:spPr>
         <p:txBody>
           <a:bodyPr anchorCtr="0" anchor="ctr" bIns="45700" lIns="91425" spcFirstLastPara="1" rIns="91425" wrap="square" tIns="45700">
-            <a:normAutofit/>
+            <a:normAutofit fontScale="90000"/>
           </a:bodyPr>
           <a:lstStyle/>
           <a:p>
@@ -11725,7 +12590,7 @@
               <a:buClr>
                 <a:schemeClr val="dk1"/>
               </a:buClr>
-              <a:buSzPts val="4400"/>
+              <a:buSzPct val="100000"/>
               <a:buFont typeface="Calibri"/>
               <a:buNone/>
             </a:pPr>
@@ -11739,7 +12604,11 @@
                 <a:cs typeface="Calibri"/>
                 <a:sym typeface="Calibri"/>
               </a:rPr>
-              <a:t>UML da Classe ArranjoOrdenado</a:t>
+              <a:t>Estrutura de Dados: </a:t>
+            </a:r>
+            <a:r>
+              <a:rPr lang="en-US"/>
+              <a:t>Arranjo Ordenado</a:t>
             </a:r>
             <a:endParaRPr/>
           </a:p>
@@ -11747,7 +12616,7 @@
       </p:sp>
       <p:sp>
         <p:nvSpPr>
-          <p:cNvPr id="98" name="Google Shape;98;p3"/>
+          <p:cNvPr id="98" name="Google Shape;98;g3ce66e988a9_1_0"/>
           <p:cNvSpPr txBox="1"/>
           <p:nvPr>
             <p:ph idx="1" type="body"/>
@@ -11756,7 +12625,7 @@
         <p:spPr>
           <a:xfrm>
             <a:off x="457200" y="1600200"/>
-            <a:ext cx="8229600" cy="4525963"/>
+            <a:ext cx="8229600" cy="4526100"/>
           </a:xfrm>
           <a:prstGeom prst="rect">
             <a:avLst/>
@@ -11768,13 +12637,16 @@
         </p:spPr>
         <p:txBody>
           <a:bodyPr anchorCtr="0" anchor="t" bIns="45700" lIns="91425" spcFirstLastPara="1" rIns="91425" wrap="square" tIns="45700">
-            <a:normAutofit lnSpcReduction="10000"/>
+            <a:noAutofit/>
           </a:bodyPr>
           <a:lstStyle/>
           <a:p>
-            <a:pPr indent="0" lvl="0" marL="342900" rtl="0" algn="l">
-              <a:spcBef>
-                <a:spcPts val="640"/>
+            <a:pPr indent="0" lvl="0" marL="0" rtl="0" algn="l">
+              <a:lnSpc>
+                <a:spcPct val="115000"/>
+              </a:lnSpc>
+              <a:spcBef>
+                <a:spcPts val="1200"/>
               </a:spcBef>
               <a:spcAft>
                 <a:spcPts val="0"/>
@@ -11787,15 +12659,28 @@
               <a:buNone/>
             </a:pPr>
             <a:r>
-              <a:rPr lang="en-US" sz="2500"/>
-              <a:t>ArranjoOrdenado</a:t>
+              <a:rPr lang="en-US" sz="2000">
+                <a:latin typeface="Arial"/>
+                <a:ea typeface="Arial"/>
+                <a:cs typeface="Arial"/>
+                <a:sym typeface="Arial"/>
+              </a:rPr>
+              <a:t>Um arranjo ordenado mantém seus elementos sempre organizados de acordo com um critério de ordem.</a:t>
             </a:r>
-            <a:endParaRPr sz="2500"/>
+            <a:endParaRPr sz="2000">
+              <a:latin typeface="Arial"/>
+              <a:ea typeface="Arial"/>
+              <a:cs typeface="Arial"/>
+              <a:sym typeface="Arial"/>
+            </a:endParaRPr>
           </a:p>
           <a:p>
-            <a:pPr indent="0" lvl="0" marL="342900" rtl="0" algn="l">
-              <a:spcBef>
-                <a:spcPts val="640"/>
+            <a:pPr indent="0" lvl="0" marL="0" rtl="0" algn="l">
+              <a:lnSpc>
+                <a:spcPct val="115000"/>
+              </a:lnSpc>
+              <a:spcBef>
+                <a:spcPts val="1200"/>
               </a:spcBef>
               <a:spcAft>
                 <a:spcPts val="0"/>
@@ -11808,173 +12693,172 @@
               <a:buNone/>
             </a:pPr>
             <a:r>
-              <a:rPr lang="en-US" sz="2500"/>
-              <a:t>------------------------------</a:t>
+              <a:rPr lang="en-US" sz="2000">
+                <a:latin typeface="Arial"/>
+                <a:ea typeface="Arial"/>
+                <a:cs typeface="Arial"/>
+                <a:sym typeface="Arial"/>
+              </a:rPr>
+              <a:t>Características:</a:t>
             </a:r>
-            <a:endParaRPr sz="2500"/>
+            <a:endParaRPr sz="2000">
+              <a:latin typeface="Arial"/>
+              <a:ea typeface="Arial"/>
+              <a:cs typeface="Arial"/>
+              <a:sym typeface="Arial"/>
+            </a:endParaRPr>
           </a:p>
           <a:p>
-            <a:pPr indent="0" lvl="0" marL="342900" rtl="0" algn="l">
-              <a:spcBef>
-                <a:spcPts val="640"/>
-              </a:spcBef>
-              <a:spcAft>
-                <a:spcPts val="0"/>
-              </a:spcAft>
-              <a:buClr>
-                <a:schemeClr val="dk1"/>
-              </a:buClr>
-              <a:buSzPts val="1100"/>
-              <a:buFont typeface="Arial"/>
-              <a:buNone/>
+            <a:pPr indent="-355600" lvl="0" marL="457200" rtl="0" algn="l">
+              <a:lnSpc>
+                <a:spcPct val="115000"/>
+              </a:lnSpc>
+              <a:spcBef>
+                <a:spcPts val="1200"/>
+              </a:spcBef>
+              <a:spcAft>
+                <a:spcPts val="0"/>
+              </a:spcAft>
+              <a:buSzPts val="2000"/>
+              <a:buChar char="●"/>
             </a:pPr>
             <a:r>
-              <a:rPr lang="en-US" sz="2500"/>
-              <a:t>- int[] arranjo</a:t>
+              <a:rPr lang="en-US" sz="2000">
+                <a:latin typeface="Arial"/>
+                <a:ea typeface="Arial"/>
+                <a:cs typeface="Arial"/>
+                <a:sym typeface="Arial"/>
+              </a:rPr>
+              <a:t>Armazena números inteiros</a:t>
             </a:r>
-            <a:endParaRPr sz="2500"/>
+            <a:endParaRPr sz="2000">
+              <a:latin typeface="Arial"/>
+              <a:ea typeface="Arial"/>
+              <a:cs typeface="Arial"/>
+              <a:sym typeface="Arial"/>
+            </a:endParaRPr>
           </a:p>
           <a:p>
-            <a:pPr indent="0" lvl="0" marL="342900" rtl="0" algn="l">
-              <a:spcBef>
-                <a:spcPts val="640"/>
-              </a:spcBef>
-              <a:spcAft>
-                <a:spcPts val="0"/>
-              </a:spcAft>
-              <a:buClr>
-                <a:schemeClr val="dk1"/>
-              </a:buClr>
-              <a:buSzPts val="1100"/>
-              <a:buFont typeface="Arial"/>
-              <a:buNone/>
+            <a:pPr indent="-355600" lvl="0" marL="457200" rtl="0" algn="l">
+              <a:lnSpc>
+                <a:spcPct val="115000"/>
+              </a:lnSpc>
+              <a:spcBef>
+                <a:spcPts val="0"/>
+              </a:spcBef>
+              <a:spcAft>
+                <a:spcPts val="0"/>
+              </a:spcAft>
+              <a:buSzPts val="2000"/>
+              <a:buChar char="●"/>
             </a:pPr>
             <a:r>
-              <a:rPr lang="en-US" sz="2500"/>
-              <a:t>- int tamanho</a:t>
+              <a:rPr lang="en-US" sz="2000">
+                <a:latin typeface="Arial"/>
+                <a:ea typeface="Arial"/>
+                <a:cs typeface="Arial"/>
+                <a:sym typeface="Arial"/>
+              </a:rPr>
+              <a:t>Mantém ordenação automática</a:t>
             </a:r>
-            <a:endParaRPr sz="2500"/>
+            <a:endParaRPr sz="2000">
+              <a:latin typeface="Arial"/>
+              <a:ea typeface="Arial"/>
+              <a:cs typeface="Arial"/>
+              <a:sym typeface="Arial"/>
+            </a:endParaRPr>
           </a:p>
           <a:p>
-            <a:pPr indent="0" lvl="0" marL="342900" rtl="0" algn="l">
-              <a:spcBef>
-                <a:spcPts val="640"/>
-              </a:spcBef>
-              <a:spcAft>
-                <a:spcPts val="0"/>
-              </a:spcAft>
-              <a:buClr>
-                <a:schemeClr val="dk1"/>
-              </a:buClr>
-              <a:buSzPts val="1100"/>
-              <a:buFont typeface="Arial"/>
-              <a:buNone/>
+            <a:pPr indent="-355600" lvl="0" marL="457200" rtl="0" algn="l">
+              <a:lnSpc>
+                <a:spcPct val="115000"/>
+              </a:lnSpc>
+              <a:spcBef>
+                <a:spcPts val="0"/>
+              </a:spcBef>
+              <a:spcAft>
+                <a:spcPts val="0"/>
+              </a:spcAft>
+              <a:buSzPts val="2000"/>
+              <a:buChar char="●"/>
             </a:pPr>
             <a:r>
-              <a:rPr lang="en-US" sz="2500"/>
-              <a:t>- int capacidade</a:t>
+              <a:rPr lang="en-US" sz="2000">
+                <a:latin typeface="Arial"/>
+                <a:ea typeface="Arial"/>
+                <a:cs typeface="Arial"/>
+                <a:sym typeface="Arial"/>
+              </a:rPr>
+              <a:t>Inserir pode exigir deslocamento de elementos</a:t>
             </a:r>
-            <a:endParaRPr sz="2500"/>
+            <a:endParaRPr sz="2000">
+              <a:latin typeface="Arial"/>
+              <a:ea typeface="Arial"/>
+              <a:cs typeface="Arial"/>
+              <a:sym typeface="Arial"/>
+            </a:endParaRPr>
           </a:p>
           <a:p>
-            <a:pPr indent="0" lvl="0" marL="342900" rtl="0" algn="l">
-              <a:spcBef>
-                <a:spcPts val="640"/>
-              </a:spcBef>
-              <a:spcAft>
-                <a:spcPts val="0"/>
-              </a:spcAft>
-              <a:buClr>
-                <a:schemeClr val="dk1"/>
-              </a:buClr>
-              <a:buSzPts val="1100"/>
-              <a:buFont typeface="Arial"/>
-              <a:buNone/>
+            <a:pPr indent="-355600" lvl="0" marL="457200" rtl="0" algn="l">
+              <a:lnSpc>
+                <a:spcPct val="115000"/>
+              </a:lnSpc>
+              <a:spcBef>
+                <a:spcPts val="0"/>
+              </a:spcBef>
+              <a:spcAft>
+                <a:spcPts val="0"/>
+              </a:spcAft>
+              <a:buSzPts val="2000"/>
+              <a:buChar char="●"/>
             </a:pPr>
             <a:r>
-              <a:rPr lang="en-US" sz="2500"/>
-              <a:t>------------------------------</a:t>
+              <a:rPr lang="en-US" sz="2000">
+                <a:latin typeface="Arial"/>
+                <a:ea typeface="Arial"/>
+                <a:cs typeface="Arial"/>
+                <a:sym typeface="Arial"/>
+              </a:rPr>
+              <a:t>Excluir também pode exigir deslocamento</a:t>
             </a:r>
-            <a:endParaRPr sz="2500"/>
+            <a:br>
+              <a:rPr lang="en-US" sz="2000">
+                <a:latin typeface="Arial"/>
+                <a:ea typeface="Arial"/>
+                <a:cs typeface="Arial"/>
+                <a:sym typeface="Arial"/>
+              </a:rPr>
+            </a:br>
+            <a:endParaRPr sz="2000">
+              <a:latin typeface="Arial"/>
+              <a:ea typeface="Arial"/>
+              <a:cs typeface="Arial"/>
+              <a:sym typeface="Arial"/>
+            </a:endParaRPr>
           </a:p>
           <a:p>
-            <a:pPr indent="0" lvl="0" marL="342900" rtl="0" algn="l">
-              <a:spcBef>
-                <a:spcPts val="640"/>
-              </a:spcBef>
-              <a:spcAft>
-                <a:spcPts val="0"/>
-              </a:spcAft>
-              <a:buClr>
-                <a:schemeClr val="dk1"/>
-              </a:buClr>
-              <a:buSzPts val="1100"/>
-              <a:buFont typeface="Arial"/>
+            <a:pPr indent="0" lvl="0" marL="0" rtl="0" algn="l">
+              <a:lnSpc>
+                <a:spcPct val="115000"/>
+              </a:lnSpc>
+              <a:spcBef>
+                <a:spcPts val="1200"/>
+              </a:spcBef>
+              <a:spcAft>
+                <a:spcPts val="1200"/>
+              </a:spcAft>
               <a:buNone/>
             </a:pPr>
             <a:r>
-              <a:rPr lang="en-US" sz="2500"/>
-              <a:t>+ ArranjoOrdenado(int capacidade)</a:t>
+              <a:rPr lang="en-US" sz="2000">
+                <a:latin typeface="Arial"/>
+                <a:ea typeface="Arial"/>
+                <a:cs typeface="Arial"/>
+                <a:sym typeface="Arial"/>
+              </a:rPr>
+              <a:t>Capacidade usada no experimento: 100.000 elementos</a:t>
             </a:r>
-            <a:endParaRPr sz="2500"/>
-          </a:p>
-          <a:p>
-            <a:pPr indent="0" lvl="0" marL="342900" rtl="0" algn="l">
-              <a:spcBef>
-                <a:spcPts val="640"/>
-              </a:spcBef>
-              <a:spcAft>
-                <a:spcPts val="0"/>
-              </a:spcAft>
-              <a:buClr>
-                <a:schemeClr val="dk1"/>
-              </a:buClr>
-              <a:buSzPts val="1100"/>
-              <a:buFont typeface="Arial"/>
-              <a:buNone/>
-            </a:pPr>
-            <a:r>
-              <a:rPr lang="en-US" sz="2500"/>
-              <a:t>+ void inserir(int valor)</a:t>
-            </a:r>
-            <a:endParaRPr sz="2500"/>
-          </a:p>
-          <a:p>
-            <a:pPr indent="0" lvl="0" marL="342900" rtl="0" algn="l">
-              <a:spcBef>
-                <a:spcPts val="640"/>
-              </a:spcBef>
-              <a:spcAft>
-                <a:spcPts val="0"/>
-              </a:spcAft>
-              <a:buClr>
-                <a:schemeClr val="dk1"/>
-              </a:buClr>
-              <a:buSzPts val="1100"/>
-              <a:buFont typeface="Arial"/>
-              <a:buNone/>
-            </a:pPr>
-            <a:r>
-              <a:rPr lang="en-US" sz="2500"/>
-              <a:t>+ void excluir(int valor)</a:t>
-            </a:r>
-            <a:endParaRPr sz="2500"/>
-          </a:p>
-          <a:p>
-            <a:pPr indent="0" lvl="0" marL="342900" rtl="0" algn="l">
-              <a:spcBef>
-                <a:spcPts val="640"/>
-              </a:spcBef>
-              <a:spcAft>
-                <a:spcPts val="0"/>
-              </a:spcAft>
-              <a:buNone/>
-            </a:pPr>
-            <a:r>
-              <a:rPr lang="en-US" sz="2500"/>
-              <a:t>+ void percorrer(Consumer&lt;Integer&gt;)</a:t>
-            </a:r>
-            <a:endParaRPr sz="2500"/>
+            <a:endParaRPr sz="2000"/>
           </a:p>
         </p:txBody>
       </p:sp>
@@ -12005,7 +12889,7 @@
       </p:grpSpPr>
       <p:sp>
         <p:nvSpPr>
-          <p:cNvPr id="103" name="Google Shape;103;p4"/>
+          <p:cNvPr id="103" name="Google Shape;103;p3"/>
           <p:cNvSpPr txBox="1"/>
           <p:nvPr>
             <p:ph type="title"/>
@@ -12045,8 +12929,16 @@
               <a:buNone/>
             </a:pPr>
             <a:r>
-              <a:rPr lang="en-US"/>
-              <a:t>Processo</a:t>
+              <a:rPr lang="en-US" sz="4400">
+                <a:solidFill>
+                  <a:schemeClr val="dk1"/>
+                </a:solidFill>
+                <a:latin typeface="Calibri"/>
+                <a:ea typeface="Calibri"/>
+                <a:cs typeface="Calibri"/>
+                <a:sym typeface="Calibri"/>
+              </a:rPr>
+              <a:t>UML da Classe ArranjoOrdenado</a:t>
             </a:r>
             <a:endParaRPr/>
           </a:p>
@@ -12054,7 +12946,7 @@
       </p:sp>
       <p:sp>
         <p:nvSpPr>
-          <p:cNvPr id="104" name="Google Shape;104;p4"/>
+          <p:cNvPr id="104" name="Google Shape;104;p3"/>
           <p:cNvSpPr txBox="1"/>
           <p:nvPr>
             <p:ph idx="1" type="body"/>
@@ -12079,31 +12971,34 @@
           </a:bodyPr>
           <a:lstStyle/>
           <a:p>
-            <a:pPr indent="0" lvl="0" marL="0" rtl="0" algn="l">
-              <a:spcBef>
-                <a:spcPts val="0"/>
-              </a:spcBef>
-              <a:spcAft>
-                <a:spcPts val="0"/>
-              </a:spcAft>
+            <a:pPr indent="0" lvl="0" marL="342900" rtl="0" algn="l">
+              <a:lnSpc>
+                <a:spcPct val="80000"/>
+              </a:lnSpc>
+              <a:spcBef>
+                <a:spcPts val="640"/>
+              </a:spcBef>
+              <a:spcAft>
+                <a:spcPts val="0"/>
+              </a:spcAft>
+              <a:buClr>
+                <a:schemeClr val="dk1"/>
+              </a:buClr>
+              <a:buSzPts val="523"/>
+              <a:buFont typeface="Arial"/>
               <a:buNone/>
             </a:pPr>
             <a:r>
-              <a:rPr lang="en-US" sz="2500">
-                <a:solidFill>
-                  <a:schemeClr val="dk1"/>
-                </a:solidFill>
-                <a:latin typeface="Calibri"/>
-                <a:ea typeface="Calibri"/>
-                <a:cs typeface="Calibri"/>
-                <a:sym typeface="Calibri"/>
-              </a:rPr>
-              <a:t>Inserção:</a:t>
+              <a:rPr lang="en-US" sz="1387"/>
+              <a:t>ArranjoOrdenado</a:t>
             </a:r>
-            <a:endParaRPr sz="2500"/>
+            <a:endParaRPr sz="1387"/>
           </a:p>
           <a:p>
-            <a:pPr indent="-298450" lvl="0" marL="342900" rtl="0" algn="l">
+            <a:pPr indent="0" lvl="0" marL="342900" rtl="0" algn="l">
+              <a:lnSpc>
+                <a:spcPct val="80000"/>
+              </a:lnSpc>
               <a:spcBef>
                 <a:spcPts val="640"/>
               </a:spcBef>
@@ -12113,25 +13008,21 @@
               <a:buClr>
                 <a:schemeClr val="dk1"/>
               </a:buClr>
-              <a:buSzPts val="2500"/>
-              <a:buChar char="•"/>
+              <a:buSzPts val="523"/>
+              <a:buFont typeface="Arial"/>
+              <a:buNone/>
             </a:pPr>
             <a:r>
-              <a:rPr lang="en-US" sz="2500">
-                <a:solidFill>
-                  <a:schemeClr val="dk1"/>
-                </a:solidFill>
-                <a:latin typeface="Calibri"/>
-                <a:ea typeface="Calibri"/>
-                <a:cs typeface="Calibri"/>
-                <a:sym typeface="Calibri"/>
-              </a:rPr>
-              <a:t>1. Encontrar a posição correta do elemento</a:t>
+              <a:rPr lang="en-US" sz="1387"/>
+              <a:t>--------------------------------------------------------------------------</a:t>
             </a:r>
-            <a:endParaRPr sz="2500"/>
+            <a:endParaRPr sz="1387"/>
           </a:p>
           <a:p>
-            <a:pPr indent="-298450" lvl="0" marL="342900" rtl="0" algn="l">
+            <a:pPr indent="0" lvl="0" marL="342900" rtl="0" algn="l">
+              <a:lnSpc>
+                <a:spcPct val="80000"/>
+              </a:lnSpc>
               <a:spcBef>
                 <a:spcPts val="640"/>
               </a:spcBef>
@@ -12141,25 +13032,21 @@
               <a:buClr>
                 <a:schemeClr val="dk1"/>
               </a:buClr>
-              <a:buSzPts val="2500"/>
-              <a:buChar char="•"/>
+              <a:buSzPts val="523"/>
+              <a:buFont typeface="Arial"/>
+              <a:buNone/>
             </a:pPr>
             <a:r>
-              <a:rPr lang="en-US" sz="2500">
-                <a:solidFill>
-                  <a:schemeClr val="dk1"/>
-                </a:solidFill>
-                <a:latin typeface="Calibri"/>
-                <a:ea typeface="Calibri"/>
-                <a:cs typeface="Calibri"/>
-                <a:sym typeface="Calibri"/>
-              </a:rPr>
-              <a:t>2. Deslocar os elementos para a direita</a:t>
+              <a:rPr lang="en-US" sz="1387"/>
+              <a:t>- int[] arranjo</a:t>
             </a:r>
-            <a:endParaRPr sz="2500"/>
+            <a:endParaRPr sz="1387"/>
           </a:p>
           <a:p>
-            <a:pPr indent="-298450" lvl="0" marL="342900" rtl="0" algn="l">
+            <a:pPr indent="0" lvl="0" marL="342900" rtl="0" algn="l">
+              <a:lnSpc>
+                <a:spcPct val="80000"/>
+              </a:lnSpc>
               <a:spcBef>
                 <a:spcPts val="640"/>
               </a:spcBef>
@@ -12169,25 +13056,21 @@
               <a:buClr>
                 <a:schemeClr val="dk1"/>
               </a:buClr>
-              <a:buSzPts val="2500"/>
-              <a:buChar char="•"/>
+              <a:buSzPts val="523"/>
+              <a:buFont typeface="Arial"/>
+              <a:buNone/>
             </a:pPr>
             <a:r>
-              <a:rPr lang="en-US" sz="2500">
-                <a:solidFill>
-                  <a:schemeClr val="dk1"/>
-                </a:solidFill>
-                <a:latin typeface="Calibri"/>
-                <a:ea typeface="Calibri"/>
-                <a:cs typeface="Calibri"/>
-                <a:sym typeface="Calibri"/>
-              </a:rPr>
-              <a:t>3. Inserir o novo valor</a:t>
+              <a:rPr lang="en-US" sz="1387"/>
+              <a:t>- int capacidade</a:t>
             </a:r>
-            <a:endParaRPr sz="2500"/>
+            <a:endParaRPr sz="1387"/>
           </a:p>
           <a:p>
-            <a:pPr indent="-139700" lvl="0" marL="342900" rtl="0" algn="l">
+            <a:pPr indent="0" lvl="0" marL="342900" rtl="0" algn="l">
+              <a:lnSpc>
+                <a:spcPct val="80000"/>
+              </a:lnSpc>
               <a:spcBef>
                 <a:spcPts val="640"/>
               </a:spcBef>
@@ -12197,48 +13080,45 @@
               <a:buClr>
                 <a:schemeClr val="dk1"/>
               </a:buClr>
-              <a:buSzPts val="3200"/>
+              <a:buSzPts val="523"/>
+              <a:buFont typeface="Arial"/>
               <a:buNone/>
             </a:pPr>
             <a:r>
-              <a:t/>
+              <a:rPr lang="en-US" sz="1387"/>
+              <a:t>- int tamanho</a:t>
             </a:r>
-            <a:endParaRPr sz="2500">
-              <a:solidFill>
-                <a:schemeClr val="dk1"/>
-              </a:solidFill>
-              <a:latin typeface="Calibri"/>
-              <a:ea typeface="Calibri"/>
-              <a:cs typeface="Calibri"/>
-              <a:sym typeface="Calibri"/>
-            </a:endParaRPr>
+            <a:endParaRPr sz="1387"/>
           </a:p>
           <a:p>
-            <a:pPr indent="0" lvl="0" marL="0" rtl="0" algn="l">
+            <a:pPr indent="0" lvl="0" marL="342900" rtl="0" algn="l">
+              <a:lnSpc>
+                <a:spcPct val="80000"/>
+              </a:lnSpc>
               <a:spcBef>
                 <a:spcPts val="640"/>
               </a:spcBef>
               <a:spcAft>
                 <a:spcPts val="0"/>
               </a:spcAft>
+              <a:buClr>
+                <a:schemeClr val="dk1"/>
+              </a:buClr>
+              <a:buSzPts val="523"/>
+              <a:buFont typeface="Arial"/>
               <a:buNone/>
             </a:pPr>
             <a:r>
-              <a:rPr lang="en-US" sz="2500">
-                <a:solidFill>
-                  <a:schemeClr val="dk1"/>
-                </a:solidFill>
-                <a:latin typeface="Calibri"/>
-                <a:ea typeface="Calibri"/>
-                <a:cs typeface="Calibri"/>
-                <a:sym typeface="Calibri"/>
-              </a:rPr>
-              <a:t>Exclusão:</a:t>
+              <a:rPr lang="en-US" sz="1387"/>
+              <a:t>- boolean crescente</a:t>
             </a:r>
-            <a:endParaRPr sz="2500"/>
+            <a:endParaRPr sz="1387"/>
           </a:p>
           <a:p>
-            <a:pPr indent="-298450" lvl="0" marL="342900" rtl="0" algn="l">
+            <a:pPr indent="0" lvl="0" marL="342900" rtl="0" algn="l">
+              <a:lnSpc>
+                <a:spcPct val="80000"/>
+              </a:lnSpc>
               <a:spcBef>
                 <a:spcPts val="640"/>
               </a:spcBef>
@@ -12248,25 +13128,21 @@
               <a:buClr>
                 <a:schemeClr val="dk1"/>
               </a:buClr>
-              <a:buSzPts val="2500"/>
-              <a:buChar char="•"/>
+              <a:buSzPts val="523"/>
+              <a:buFont typeface="Arial"/>
+              <a:buNone/>
             </a:pPr>
             <a:r>
-              <a:rPr lang="en-US" sz="2500">
-                <a:solidFill>
-                  <a:schemeClr val="dk1"/>
-                </a:solidFill>
-                <a:latin typeface="Calibri"/>
-                <a:ea typeface="Calibri"/>
-                <a:cs typeface="Calibri"/>
-                <a:sym typeface="Calibri"/>
-              </a:rPr>
-              <a:t>1. Encontrar o elemento</a:t>
+              <a:rPr lang="en-US" sz="1387"/>
+              <a:t>---------------------------------------------------------------------------</a:t>
             </a:r>
-            <a:endParaRPr sz="2500"/>
+            <a:endParaRPr sz="1387"/>
           </a:p>
           <a:p>
-            <a:pPr indent="-298450" lvl="0" marL="342900" rtl="0" algn="l">
+            <a:pPr indent="0" lvl="0" marL="342900" rtl="0" algn="l">
+              <a:lnSpc>
+                <a:spcPct val="80000"/>
+              </a:lnSpc>
               <a:spcBef>
                 <a:spcPts val="640"/>
               </a:spcBef>
@@ -12276,22 +13152,275 @@
               <a:buClr>
                 <a:schemeClr val="dk1"/>
               </a:buClr>
-              <a:buSzPts val="2500"/>
-              <a:buChar char="•"/>
+              <a:buSzPts val="523"/>
+              <a:buFont typeface="Arial"/>
+              <a:buNone/>
             </a:pPr>
             <a:r>
-              <a:rPr lang="en-US" sz="2500">
-                <a:solidFill>
-                  <a:schemeClr val="dk1"/>
-                </a:solidFill>
-                <a:latin typeface="Calibri"/>
-                <a:ea typeface="Calibri"/>
-                <a:cs typeface="Calibri"/>
-                <a:sym typeface="Calibri"/>
-              </a:rPr>
-              <a:t>2. Deslocar os elementos para a esquerda</a:t>
+              <a:rPr lang="en-US" sz="1387"/>
+              <a:t>+ ArranjoOrdenado(int capacidade, boolean crescente)</a:t>
             </a:r>
-            <a:endParaRPr sz="2500"/>
+            <a:endParaRPr sz="1387"/>
+          </a:p>
+          <a:p>
+            <a:pPr indent="0" lvl="0" marL="342900" rtl="0" algn="l">
+              <a:lnSpc>
+                <a:spcPct val="80000"/>
+              </a:lnSpc>
+              <a:spcBef>
+                <a:spcPts val="640"/>
+              </a:spcBef>
+              <a:spcAft>
+                <a:spcPts val="0"/>
+              </a:spcAft>
+              <a:buClr>
+                <a:schemeClr val="dk1"/>
+              </a:buClr>
+              <a:buSzPts val="523"/>
+              <a:buFont typeface="Arial"/>
+              <a:buNone/>
+            </a:pPr>
+            <a:r>
+              <a:rPr lang="en-US" sz="1387"/>
+              <a:t>+ void inserir(int valor)</a:t>
+            </a:r>
+            <a:endParaRPr sz="1387"/>
+          </a:p>
+          <a:p>
+            <a:pPr indent="0" lvl="0" marL="342900" rtl="0" algn="l">
+              <a:lnSpc>
+                <a:spcPct val="80000"/>
+              </a:lnSpc>
+              <a:spcBef>
+                <a:spcPts val="640"/>
+              </a:spcBef>
+              <a:spcAft>
+                <a:spcPts val="0"/>
+              </a:spcAft>
+              <a:buClr>
+                <a:schemeClr val="dk1"/>
+              </a:buClr>
+              <a:buSzPts val="523"/>
+              <a:buFont typeface="Arial"/>
+              <a:buNone/>
+            </a:pPr>
+            <a:r>
+              <a:rPr lang="en-US" sz="1387"/>
+              <a:t>+ void excluir(int valor)</a:t>
+            </a:r>
+            <a:endParaRPr sz="1387"/>
+          </a:p>
+          <a:p>
+            <a:pPr indent="0" lvl="0" marL="342900" rtl="0" algn="l">
+              <a:lnSpc>
+                <a:spcPct val="80000"/>
+              </a:lnSpc>
+              <a:spcBef>
+                <a:spcPts val="640"/>
+              </a:spcBef>
+              <a:spcAft>
+                <a:spcPts val="0"/>
+              </a:spcAft>
+              <a:buClr>
+                <a:schemeClr val="dk1"/>
+              </a:buClr>
+              <a:buSzPts val="523"/>
+              <a:buFont typeface="Arial"/>
+              <a:buNone/>
+            </a:pPr>
+            <a:r>
+              <a:rPr lang="en-US" sz="1387"/>
+              <a:t>+ void percorrer(Consumer&lt;Integer&gt;)</a:t>
+            </a:r>
+            <a:endParaRPr sz="1387"/>
+          </a:p>
+          <a:p>
+            <a:pPr indent="0" lvl="0" marL="342900" rtl="0" algn="l">
+              <a:lnSpc>
+                <a:spcPct val="80000"/>
+              </a:lnSpc>
+              <a:spcBef>
+                <a:spcPts val="640"/>
+              </a:spcBef>
+              <a:spcAft>
+                <a:spcPts val="0"/>
+              </a:spcAft>
+              <a:buClr>
+                <a:schemeClr val="dk1"/>
+              </a:buClr>
+              <a:buSzPts val="523"/>
+              <a:buFont typeface="Arial"/>
+              <a:buNone/>
+            </a:pPr>
+            <a:r>
+              <a:rPr lang="en-US" sz="1387"/>
+              <a:t>+ static long inserirCrescente(int n)</a:t>
+            </a:r>
+            <a:endParaRPr sz="1387"/>
+          </a:p>
+          <a:p>
+            <a:pPr indent="0" lvl="0" marL="342900" rtl="0" algn="l">
+              <a:lnSpc>
+                <a:spcPct val="80000"/>
+              </a:lnSpc>
+              <a:spcBef>
+                <a:spcPts val="640"/>
+              </a:spcBef>
+              <a:spcAft>
+                <a:spcPts val="0"/>
+              </a:spcAft>
+              <a:buClr>
+                <a:schemeClr val="dk1"/>
+              </a:buClr>
+              <a:buSzPts val="523"/>
+              <a:buFont typeface="Arial"/>
+              <a:buNone/>
+            </a:pPr>
+            <a:r>
+              <a:rPr lang="en-US" sz="1387"/>
+              <a:t>+ static long inserirDescrescente(int n)</a:t>
+            </a:r>
+            <a:endParaRPr sz="1387"/>
+          </a:p>
+          <a:p>
+            <a:pPr indent="0" lvl="0" marL="342900" rtl="0" algn="l">
+              <a:lnSpc>
+                <a:spcPct val="80000"/>
+              </a:lnSpc>
+              <a:spcBef>
+                <a:spcPts val="640"/>
+              </a:spcBef>
+              <a:spcAft>
+                <a:spcPts val="0"/>
+              </a:spcAft>
+              <a:buClr>
+                <a:schemeClr val="dk1"/>
+              </a:buClr>
+              <a:buSzPts val="523"/>
+              <a:buFont typeface="Arial"/>
+              <a:buNone/>
+            </a:pPr>
+            <a:r>
+              <a:rPr lang="en-US" sz="1387"/>
+              <a:t>+ static long inserirAleatorio(int n)</a:t>
+            </a:r>
+            <a:endParaRPr sz="1387"/>
+          </a:p>
+          <a:p>
+            <a:pPr indent="0" lvl="0" marL="342900" rtl="0" algn="l">
+              <a:lnSpc>
+                <a:spcPct val="80000"/>
+              </a:lnSpc>
+              <a:spcBef>
+                <a:spcPts val="640"/>
+              </a:spcBef>
+              <a:spcAft>
+                <a:spcPts val="0"/>
+              </a:spcAft>
+              <a:buClr>
+                <a:schemeClr val="dk1"/>
+              </a:buClr>
+              <a:buSzPts val="523"/>
+              <a:buFont typeface="Arial"/>
+              <a:buNone/>
+            </a:pPr>
+            <a:r>
+              <a:rPr lang="en-US" sz="1387"/>
+              <a:t>+ static long excluirCrescente(int n)</a:t>
+            </a:r>
+            <a:endParaRPr sz="1387"/>
+          </a:p>
+          <a:p>
+            <a:pPr indent="0" lvl="0" marL="342900" rtl="0" algn="l">
+              <a:lnSpc>
+                <a:spcPct val="80000"/>
+              </a:lnSpc>
+              <a:spcBef>
+                <a:spcPts val="640"/>
+              </a:spcBef>
+              <a:spcAft>
+                <a:spcPts val="0"/>
+              </a:spcAft>
+              <a:buClr>
+                <a:schemeClr val="dk1"/>
+              </a:buClr>
+              <a:buSzPts val="523"/>
+              <a:buFont typeface="Arial"/>
+              <a:buNone/>
+            </a:pPr>
+            <a:r>
+              <a:rPr lang="en-US" sz="1387"/>
+              <a:t>+ static long excluirDecrescente(int n)</a:t>
+            </a:r>
+            <a:endParaRPr sz="1387"/>
+          </a:p>
+          <a:p>
+            <a:pPr indent="0" lvl="0" marL="342900" rtl="0" algn="l">
+              <a:lnSpc>
+                <a:spcPct val="80000"/>
+              </a:lnSpc>
+              <a:spcBef>
+                <a:spcPts val="640"/>
+              </a:spcBef>
+              <a:spcAft>
+                <a:spcPts val="0"/>
+              </a:spcAft>
+              <a:buClr>
+                <a:schemeClr val="dk1"/>
+              </a:buClr>
+              <a:buSzPts val="523"/>
+              <a:buFont typeface="Arial"/>
+              <a:buNone/>
+            </a:pPr>
+            <a:r>
+              <a:rPr lang="en-US" sz="1387"/>
+              <a:t>+ static long excluirAleatorio(int n)</a:t>
+            </a:r>
+            <a:endParaRPr sz="1387"/>
+          </a:p>
+          <a:p>
+            <a:pPr indent="0" lvl="0" marL="342900" rtl="0" algn="l">
+              <a:lnSpc>
+                <a:spcPct val="80000"/>
+              </a:lnSpc>
+              <a:spcBef>
+                <a:spcPts val="640"/>
+              </a:spcBef>
+              <a:spcAft>
+                <a:spcPts val="0"/>
+              </a:spcAft>
+              <a:buClr>
+                <a:schemeClr val="dk1"/>
+              </a:buClr>
+              <a:buSzPts val="523"/>
+              <a:buFont typeface="Arial"/>
+              <a:buNone/>
+            </a:pPr>
+            <a:r>
+              <a:rPr lang="en-US" sz="1387"/>
+              <a:t>+ static double media(long[])</a:t>
+            </a:r>
+            <a:endParaRPr sz="1387"/>
+          </a:p>
+          <a:p>
+            <a:pPr indent="0" lvl="0" marL="342900" rtl="0" algn="l">
+              <a:lnSpc>
+                <a:spcPct val="80000"/>
+              </a:lnSpc>
+              <a:spcBef>
+                <a:spcPts val="640"/>
+              </a:spcBef>
+              <a:spcAft>
+                <a:spcPts val="0"/>
+              </a:spcAft>
+              <a:buSzPts val="523"/>
+              <a:buNone/>
+            </a:pPr>
+            <a:r>
+              <a:rPr lang="en-US" sz="1387"/>
+              <a:t>+ static double desvioPadrao(long[], double)</a:t>
+            </a:r>
+            <a:endParaRPr sz="1387"/>
           </a:p>
         </p:txBody>
       </p:sp>
@@ -12322,7 +13451,960 @@
       </p:grpSpPr>
       <p:sp>
         <p:nvSpPr>
-          <p:cNvPr id="109" name="Google Shape;109;p5"/>
+          <p:cNvPr id="109" name="Google Shape;109;g3ce66e988a9_1_9"/>
+          <p:cNvSpPr txBox="1"/>
+          <p:nvPr>
+            <p:ph type="title"/>
+          </p:nvPr>
+        </p:nvSpPr>
+        <p:spPr>
+          <a:xfrm>
+            <a:off x="457200" y="274638"/>
+            <a:ext cx="8229600" cy="1143000"/>
+          </a:xfrm>
+          <a:prstGeom prst="rect">
+            <a:avLst/>
+          </a:prstGeom>
+          <a:noFill/>
+          <a:ln>
+            <a:noFill/>
+          </a:ln>
+        </p:spPr>
+        <p:txBody>
+          <a:bodyPr anchorCtr="0" anchor="ctr" bIns="45700" lIns="91425" spcFirstLastPara="1" rIns="91425" wrap="square" tIns="45700">
+            <a:normAutofit/>
+          </a:bodyPr>
+          <a:lstStyle/>
+          <a:p>
+            <a:pPr indent="0" lvl="0" marL="0" rtl="0" algn="ctr">
+              <a:spcBef>
+                <a:spcPts val="0"/>
+              </a:spcBef>
+              <a:spcAft>
+                <a:spcPts val="0"/>
+              </a:spcAft>
+              <a:buClr>
+                <a:schemeClr val="dk1"/>
+              </a:buClr>
+              <a:buSzPts val="4400"/>
+              <a:buFont typeface="Calibri"/>
+              <a:buNone/>
+            </a:pPr>
+            <a:r>
+              <a:rPr lang="en-US"/>
+              <a:t>Implementação</a:t>
+            </a:r>
+            <a:endParaRPr/>
+          </a:p>
+        </p:txBody>
+      </p:sp>
+      <p:sp>
+        <p:nvSpPr>
+          <p:cNvPr id="110" name="Google Shape;110;g3ce66e988a9_1_9"/>
+          <p:cNvSpPr txBox="1"/>
+          <p:nvPr>
+            <p:ph idx="1" type="body"/>
+          </p:nvPr>
+        </p:nvSpPr>
+        <p:spPr>
+          <a:xfrm>
+            <a:off x="457200" y="1600200"/>
+            <a:ext cx="8229600" cy="4526100"/>
+          </a:xfrm>
+          <a:prstGeom prst="rect">
+            <a:avLst/>
+          </a:prstGeom>
+          <a:noFill/>
+          <a:ln>
+            <a:noFill/>
+          </a:ln>
+        </p:spPr>
+        <p:txBody>
+          <a:bodyPr anchorCtr="0" anchor="t" bIns="45700" lIns="91425" spcFirstLastPara="1" rIns="91425" wrap="square" tIns="45700">
+            <a:noAutofit/>
+          </a:bodyPr>
+          <a:lstStyle/>
+          <a:p>
+            <a:pPr indent="0" lvl="0" marL="0" rtl="0" algn="l">
+              <a:lnSpc>
+                <a:spcPct val="115000"/>
+              </a:lnSpc>
+              <a:spcBef>
+                <a:spcPts val="1200"/>
+              </a:spcBef>
+              <a:spcAft>
+                <a:spcPts val="0"/>
+              </a:spcAft>
+              <a:buClr>
+                <a:schemeClr val="dk1"/>
+              </a:buClr>
+              <a:buSzPts val="1100"/>
+              <a:buFont typeface="Arial"/>
+              <a:buNone/>
+            </a:pPr>
+            <a:r>
+              <a:rPr lang="en-US" sz="1900">
+                <a:latin typeface="Arial"/>
+                <a:ea typeface="Arial"/>
+                <a:cs typeface="Arial"/>
+                <a:sym typeface="Arial"/>
+              </a:rPr>
+              <a:t>A ordenação é controlada por uma variável booleana: boolean crescente</a:t>
+            </a:r>
+            <a:endParaRPr sz="1900">
+              <a:latin typeface="Arial"/>
+              <a:ea typeface="Arial"/>
+              <a:cs typeface="Arial"/>
+              <a:sym typeface="Arial"/>
+            </a:endParaRPr>
+          </a:p>
+          <a:p>
+            <a:pPr indent="0" lvl="0" marL="0" rtl="0" algn="l">
+              <a:lnSpc>
+                <a:spcPct val="115000"/>
+              </a:lnSpc>
+              <a:spcBef>
+                <a:spcPts val="1200"/>
+              </a:spcBef>
+              <a:spcAft>
+                <a:spcPts val="0"/>
+              </a:spcAft>
+              <a:buClr>
+                <a:schemeClr val="dk1"/>
+              </a:buClr>
+              <a:buSzPts val="1100"/>
+              <a:buFont typeface="Arial"/>
+              <a:buNone/>
+            </a:pPr>
+            <a:r>
+              <a:rPr lang="en-US" sz="1900">
+                <a:latin typeface="Arial"/>
+                <a:ea typeface="Arial"/>
+                <a:cs typeface="Arial"/>
+                <a:sym typeface="Arial"/>
+              </a:rPr>
+              <a:t>if (crescente){</a:t>
+            </a:r>
+            <a:endParaRPr sz="1900">
+              <a:latin typeface="Arial"/>
+              <a:ea typeface="Arial"/>
+              <a:cs typeface="Arial"/>
+              <a:sym typeface="Arial"/>
+            </a:endParaRPr>
+          </a:p>
+          <a:p>
+            <a:pPr indent="0" lvl="0" marL="0" rtl="0" algn="l">
+              <a:lnSpc>
+                <a:spcPct val="115000"/>
+              </a:lnSpc>
+              <a:spcBef>
+                <a:spcPts val="0"/>
+              </a:spcBef>
+              <a:spcAft>
+                <a:spcPts val="0"/>
+              </a:spcAft>
+              <a:buClr>
+                <a:schemeClr val="dk1"/>
+              </a:buClr>
+              <a:buSzPts val="1100"/>
+              <a:buFont typeface="Arial"/>
+              <a:buNone/>
+            </a:pPr>
+            <a:r>
+              <a:rPr lang="en-US" sz="1900">
+                <a:latin typeface="Arial"/>
+                <a:ea typeface="Arial"/>
+                <a:cs typeface="Arial"/>
+                <a:sym typeface="Arial"/>
+              </a:rPr>
+              <a:t>   if (valor &lt; arranjo[indice]){</a:t>
+            </a:r>
+            <a:endParaRPr sz="1900">
+              <a:latin typeface="Arial"/>
+              <a:ea typeface="Arial"/>
+              <a:cs typeface="Arial"/>
+              <a:sym typeface="Arial"/>
+            </a:endParaRPr>
+          </a:p>
+          <a:p>
+            <a:pPr indent="0" lvl="0" marL="0" rtl="0" algn="l">
+              <a:lnSpc>
+                <a:spcPct val="115000"/>
+              </a:lnSpc>
+              <a:spcBef>
+                <a:spcPts val="0"/>
+              </a:spcBef>
+              <a:spcAft>
+                <a:spcPts val="0"/>
+              </a:spcAft>
+              <a:buClr>
+                <a:schemeClr val="dk1"/>
+              </a:buClr>
+              <a:buSzPts val="1100"/>
+              <a:buFont typeface="Arial"/>
+              <a:buNone/>
+            </a:pPr>
+            <a:r>
+              <a:rPr lang="en-US" sz="1900">
+                <a:latin typeface="Arial"/>
+                <a:ea typeface="Arial"/>
+                <a:cs typeface="Arial"/>
+                <a:sym typeface="Arial"/>
+              </a:rPr>
+              <a:t>       break;</a:t>
+            </a:r>
+            <a:endParaRPr sz="1900">
+              <a:latin typeface="Arial"/>
+              <a:ea typeface="Arial"/>
+              <a:cs typeface="Arial"/>
+              <a:sym typeface="Arial"/>
+            </a:endParaRPr>
+          </a:p>
+          <a:p>
+            <a:pPr indent="0" lvl="0" marL="0" rtl="0" algn="l">
+              <a:lnSpc>
+                <a:spcPct val="115000"/>
+              </a:lnSpc>
+              <a:spcBef>
+                <a:spcPts val="0"/>
+              </a:spcBef>
+              <a:spcAft>
+                <a:spcPts val="0"/>
+              </a:spcAft>
+              <a:buClr>
+                <a:schemeClr val="dk1"/>
+              </a:buClr>
+              <a:buSzPts val="1100"/>
+              <a:buFont typeface="Arial"/>
+              <a:buNone/>
+            </a:pPr>
+            <a:r>
+              <a:rPr lang="en-US" sz="1900">
+                <a:latin typeface="Arial"/>
+                <a:ea typeface="Arial"/>
+                <a:cs typeface="Arial"/>
+                <a:sym typeface="Arial"/>
+              </a:rPr>
+              <a:t>   }</a:t>
+            </a:r>
+            <a:endParaRPr sz="1900">
+              <a:latin typeface="Arial"/>
+              <a:ea typeface="Arial"/>
+              <a:cs typeface="Arial"/>
+              <a:sym typeface="Arial"/>
+            </a:endParaRPr>
+          </a:p>
+          <a:p>
+            <a:pPr indent="0" lvl="0" marL="0" rtl="0" algn="l">
+              <a:lnSpc>
+                <a:spcPct val="115000"/>
+              </a:lnSpc>
+              <a:spcBef>
+                <a:spcPts val="0"/>
+              </a:spcBef>
+              <a:spcAft>
+                <a:spcPts val="0"/>
+              </a:spcAft>
+              <a:buClr>
+                <a:schemeClr val="dk1"/>
+              </a:buClr>
+              <a:buSzPts val="1100"/>
+              <a:buFont typeface="Arial"/>
+              <a:buNone/>
+            </a:pPr>
+            <a:r>
+              <a:rPr lang="en-US" sz="1900">
+                <a:latin typeface="Arial"/>
+                <a:ea typeface="Arial"/>
+                <a:cs typeface="Arial"/>
+                <a:sym typeface="Arial"/>
+              </a:rPr>
+              <a:t>} else {</a:t>
+            </a:r>
+            <a:endParaRPr sz="1900">
+              <a:latin typeface="Arial"/>
+              <a:ea typeface="Arial"/>
+              <a:cs typeface="Arial"/>
+              <a:sym typeface="Arial"/>
+            </a:endParaRPr>
+          </a:p>
+          <a:p>
+            <a:pPr indent="0" lvl="0" marL="0" rtl="0" algn="l">
+              <a:lnSpc>
+                <a:spcPct val="115000"/>
+              </a:lnSpc>
+              <a:spcBef>
+                <a:spcPts val="0"/>
+              </a:spcBef>
+              <a:spcAft>
+                <a:spcPts val="0"/>
+              </a:spcAft>
+              <a:buClr>
+                <a:schemeClr val="dk1"/>
+              </a:buClr>
+              <a:buSzPts val="1100"/>
+              <a:buFont typeface="Arial"/>
+              <a:buNone/>
+            </a:pPr>
+            <a:r>
+              <a:rPr lang="en-US" sz="1900">
+                <a:latin typeface="Arial"/>
+                <a:ea typeface="Arial"/>
+                <a:cs typeface="Arial"/>
+                <a:sym typeface="Arial"/>
+              </a:rPr>
+              <a:t>   if (valor &gt; arranjo[indice]){</a:t>
+            </a:r>
+            <a:endParaRPr sz="1900">
+              <a:latin typeface="Arial"/>
+              <a:ea typeface="Arial"/>
+              <a:cs typeface="Arial"/>
+              <a:sym typeface="Arial"/>
+            </a:endParaRPr>
+          </a:p>
+          <a:p>
+            <a:pPr indent="0" lvl="0" marL="0" rtl="0" algn="l">
+              <a:lnSpc>
+                <a:spcPct val="115000"/>
+              </a:lnSpc>
+              <a:spcBef>
+                <a:spcPts val="0"/>
+              </a:spcBef>
+              <a:spcAft>
+                <a:spcPts val="0"/>
+              </a:spcAft>
+              <a:buClr>
+                <a:schemeClr val="dk1"/>
+              </a:buClr>
+              <a:buSzPts val="1100"/>
+              <a:buFont typeface="Arial"/>
+              <a:buNone/>
+            </a:pPr>
+            <a:r>
+              <a:rPr lang="en-US" sz="1900">
+                <a:latin typeface="Arial"/>
+                <a:ea typeface="Arial"/>
+                <a:cs typeface="Arial"/>
+                <a:sym typeface="Arial"/>
+              </a:rPr>
+              <a:t>       break;</a:t>
+            </a:r>
+            <a:endParaRPr sz="1900">
+              <a:latin typeface="Arial"/>
+              <a:ea typeface="Arial"/>
+              <a:cs typeface="Arial"/>
+              <a:sym typeface="Arial"/>
+            </a:endParaRPr>
+          </a:p>
+          <a:p>
+            <a:pPr indent="0" lvl="0" marL="0" rtl="0" algn="l">
+              <a:lnSpc>
+                <a:spcPct val="115000"/>
+              </a:lnSpc>
+              <a:spcBef>
+                <a:spcPts val="0"/>
+              </a:spcBef>
+              <a:spcAft>
+                <a:spcPts val="0"/>
+              </a:spcAft>
+              <a:buClr>
+                <a:schemeClr val="dk1"/>
+              </a:buClr>
+              <a:buSzPts val="1100"/>
+              <a:buFont typeface="Arial"/>
+              <a:buNone/>
+            </a:pPr>
+            <a:r>
+              <a:rPr lang="en-US" sz="1900">
+                <a:latin typeface="Arial"/>
+                <a:ea typeface="Arial"/>
+                <a:cs typeface="Arial"/>
+                <a:sym typeface="Arial"/>
+              </a:rPr>
+              <a:t>   }</a:t>
+            </a:r>
+            <a:endParaRPr sz="1900">
+              <a:latin typeface="Arial"/>
+              <a:ea typeface="Arial"/>
+              <a:cs typeface="Arial"/>
+              <a:sym typeface="Arial"/>
+            </a:endParaRPr>
+          </a:p>
+          <a:p>
+            <a:pPr indent="0" lvl="0" marL="0" rtl="0" algn="l">
+              <a:lnSpc>
+                <a:spcPct val="115000"/>
+              </a:lnSpc>
+              <a:spcBef>
+                <a:spcPts val="0"/>
+              </a:spcBef>
+              <a:spcAft>
+                <a:spcPts val="0"/>
+              </a:spcAft>
+              <a:buClr>
+                <a:schemeClr val="dk1"/>
+              </a:buClr>
+              <a:buSzPts val="1100"/>
+              <a:buFont typeface="Arial"/>
+              <a:buNone/>
+            </a:pPr>
+            <a:r>
+              <a:rPr lang="en-US" sz="1900">
+                <a:latin typeface="Arial"/>
+                <a:ea typeface="Arial"/>
+                <a:cs typeface="Arial"/>
+                <a:sym typeface="Arial"/>
+              </a:rPr>
+              <a:t>}</a:t>
+            </a:r>
+            <a:endParaRPr sz="1900">
+              <a:latin typeface="Arial"/>
+              <a:ea typeface="Arial"/>
+              <a:cs typeface="Arial"/>
+              <a:sym typeface="Arial"/>
+            </a:endParaRPr>
+          </a:p>
+          <a:p>
+            <a:pPr indent="-349250" lvl="0" marL="457200" rtl="0" algn="l">
+              <a:lnSpc>
+                <a:spcPct val="115000"/>
+              </a:lnSpc>
+              <a:spcBef>
+                <a:spcPts val="1200"/>
+              </a:spcBef>
+              <a:spcAft>
+                <a:spcPts val="0"/>
+              </a:spcAft>
+              <a:buSzPts val="1900"/>
+              <a:buChar char="●"/>
+            </a:pPr>
+            <a:r>
+              <a:rPr lang="en-US" sz="1900">
+                <a:latin typeface="Arial"/>
+                <a:ea typeface="Arial"/>
+                <a:cs typeface="Arial"/>
+                <a:sym typeface="Arial"/>
+              </a:rPr>
+              <a:t>Se crescente = true </a:t>
+            </a:r>
+            <a:r>
+              <a:rPr lang="en-US" sz="1900">
+                <a:latin typeface="Arial"/>
+                <a:ea typeface="Arial"/>
+                <a:cs typeface="Arial"/>
+                <a:sym typeface="Arial"/>
+              </a:rPr>
+              <a:t>→</a:t>
+            </a:r>
+            <a:r>
+              <a:rPr lang="en-US" sz="1900">
+                <a:latin typeface="Arial"/>
+                <a:ea typeface="Arial"/>
+                <a:cs typeface="Arial"/>
+                <a:sym typeface="Arial"/>
+              </a:rPr>
+              <a:t> ordem crescente</a:t>
+            </a:r>
+            <a:endParaRPr sz="1900">
+              <a:latin typeface="Arial"/>
+              <a:ea typeface="Arial"/>
+              <a:cs typeface="Arial"/>
+              <a:sym typeface="Arial"/>
+            </a:endParaRPr>
+          </a:p>
+          <a:p>
+            <a:pPr indent="-349250" lvl="0" marL="457200" rtl="0" algn="l">
+              <a:lnSpc>
+                <a:spcPct val="115000"/>
+              </a:lnSpc>
+              <a:spcBef>
+                <a:spcPts val="0"/>
+              </a:spcBef>
+              <a:spcAft>
+                <a:spcPts val="0"/>
+              </a:spcAft>
+              <a:buSzPts val="1900"/>
+              <a:buChar char="●"/>
+            </a:pPr>
+            <a:r>
+              <a:rPr lang="en-US" sz="1900">
+                <a:latin typeface="Arial"/>
+                <a:ea typeface="Arial"/>
+                <a:cs typeface="Arial"/>
+                <a:sym typeface="Arial"/>
+              </a:rPr>
+              <a:t>Se crescente = false </a:t>
+            </a:r>
+            <a:r>
+              <a:rPr lang="en-US" sz="1900">
+                <a:latin typeface="Arial"/>
+                <a:ea typeface="Arial"/>
+                <a:cs typeface="Arial"/>
+                <a:sym typeface="Arial"/>
+              </a:rPr>
+              <a:t>→</a:t>
+            </a:r>
+            <a:r>
+              <a:rPr lang="en-US" sz="1900">
+                <a:latin typeface="Arial"/>
+                <a:ea typeface="Arial"/>
+                <a:cs typeface="Arial"/>
+                <a:sym typeface="Arial"/>
+              </a:rPr>
+              <a:t> ordem decrescente</a:t>
+            </a:r>
+            <a:endParaRPr sz="1900">
+              <a:latin typeface="Arial"/>
+              <a:ea typeface="Arial"/>
+              <a:cs typeface="Arial"/>
+              <a:sym typeface="Arial"/>
+            </a:endParaRPr>
+          </a:p>
+        </p:txBody>
+      </p:sp>
+    </p:spTree>
+  </p:cSld>
+  <p:clrMapOvr>
+    <a:masterClrMapping/>
+  </p:clrMapOvr>
+</p:sld>
+</file>
+
+<file path=ppt/slides/slide6.xml><?xml version="1.0" encoding="utf-8"?>
+<p:sld xmlns:a="http://schemas.openxmlformats.org/drawingml/2006/main" xmlns:r="http://schemas.openxmlformats.org/officeDocument/2006/relationships" xmlns:mc="http://schemas.openxmlformats.org/markup-compatibility/2006" xmlns:mv="urn:schemas-microsoft-com:mac:vml" xmlns:p="http://schemas.openxmlformats.org/presentationml/2006/main" xmlns:c="http://schemas.openxmlformats.org/drawingml/2006/chart" xmlns:dgm="http://schemas.openxmlformats.org/drawingml/2006/diagram" xmlns:o="urn:schemas-microsoft-com:office:office" xmlns:v="urn:schemas-microsoft-com:vml" xmlns:pvml="urn:schemas-microsoft-com:office:powerpoint" xmlns:com="http://schemas.openxmlformats.org/drawingml/2006/compatibility" xmlns:p14="http://schemas.microsoft.com/office/powerpoint/2010/main" xmlns:p15="http://schemas.microsoft.com/office/powerpoint/2012/main" xmlns:ahyp="http://schemas.microsoft.com/office/drawing/2018/hyperlinkcolor">
+  <p:cSld>
+    <p:spTree>
+      <p:nvGrpSpPr>
+        <p:cNvPr id="114" name="Shape 114"/>
+        <p:cNvGrpSpPr/>
+        <p:nvPr/>
+      </p:nvGrpSpPr>
+      <p:grpSpPr>
+        <a:xfrm>
+          <a:off x="0" y="0"/>
+          <a:ext cx="0" cy="0"/>
+          <a:chOff x="0" y="0"/>
+          <a:chExt cx="0" cy="0"/>
+        </a:xfrm>
+      </p:grpSpPr>
+      <p:sp>
+        <p:nvSpPr>
+          <p:cNvPr id="115" name="Google Shape;115;p4"/>
+          <p:cNvSpPr txBox="1"/>
+          <p:nvPr>
+            <p:ph type="title"/>
+          </p:nvPr>
+        </p:nvSpPr>
+        <p:spPr>
+          <a:xfrm>
+            <a:off x="457200" y="274638"/>
+            <a:ext cx="8229600" cy="1143000"/>
+          </a:xfrm>
+          <a:prstGeom prst="rect">
+            <a:avLst/>
+          </a:prstGeom>
+          <a:noFill/>
+          <a:ln>
+            <a:noFill/>
+          </a:ln>
+        </p:spPr>
+        <p:txBody>
+          <a:bodyPr anchorCtr="0" anchor="ctr" bIns="45700" lIns="91425" spcFirstLastPara="1" rIns="91425" wrap="square" tIns="45700">
+            <a:normAutofit/>
+          </a:bodyPr>
+          <a:lstStyle/>
+          <a:p>
+            <a:pPr indent="0" lvl="0" marL="0" rtl="0" algn="ctr">
+              <a:spcBef>
+                <a:spcPts val="0"/>
+              </a:spcBef>
+              <a:spcAft>
+                <a:spcPts val="0"/>
+              </a:spcAft>
+              <a:buClr>
+                <a:schemeClr val="dk1"/>
+              </a:buClr>
+              <a:buSzPts val="4400"/>
+              <a:buFont typeface="Calibri"/>
+              <a:buNone/>
+            </a:pPr>
+            <a:r>
+              <a:rPr lang="en-US"/>
+              <a:t>Processo</a:t>
+            </a:r>
+            <a:endParaRPr/>
+          </a:p>
+        </p:txBody>
+      </p:sp>
+      <p:sp>
+        <p:nvSpPr>
+          <p:cNvPr id="116" name="Google Shape;116;p4"/>
+          <p:cNvSpPr txBox="1"/>
+          <p:nvPr>
+            <p:ph idx="1" type="body"/>
+          </p:nvPr>
+        </p:nvSpPr>
+        <p:spPr>
+          <a:xfrm>
+            <a:off x="457200" y="1600200"/>
+            <a:ext cx="8229600" cy="4526100"/>
+          </a:xfrm>
+          <a:prstGeom prst="rect">
+            <a:avLst/>
+          </a:prstGeom>
+          <a:noFill/>
+          <a:ln>
+            <a:noFill/>
+          </a:ln>
+        </p:spPr>
+        <p:txBody>
+          <a:bodyPr anchorCtr="0" anchor="t" bIns="45700" lIns="91425" spcFirstLastPara="1" rIns="91425" wrap="square" tIns="45700">
+            <a:noAutofit/>
+          </a:bodyPr>
+          <a:lstStyle/>
+          <a:p>
+            <a:pPr indent="-330200" lvl="0" marL="457200" rtl="0" algn="l">
+              <a:lnSpc>
+                <a:spcPct val="115000"/>
+              </a:lnSpc>
+              <a:spcBef>
+                <a:spcPts val="1200"/>
+              </a:spcBef>
+              <a:spcAft>
+                <a:spcPts val="0"/>
+              </a:spcAft>
+              <a:buSzPts val="1600"/>
+              <a:buFont typeface="Arial"/>
+              <a:buAutoNum type="arabicPeriod"/>
+            </a:pPr>
+            <a:r>
+              <a:rPr lang="en-US" sz="1600">
+                <a:latin typeface="Arial"/>
+                <a:ea typeface="Arial"/>
+                <a:cs typeface="Arial"/>
+                <a:sym typeface="Arial"/>
+              </a:rPr>
+              <a:t>Criar um novo ArranjoOrdenado</a:t>
+            </a:r>
+            <a:endParaRPr sz="1600">
+              <a:latin typeface="Arial"/>
+              <a:ea typeface="Arial"/>
+              <a:cs typeface="Arial"/>
+              <a:sym typeface="Arial"/>
+            </a:endParaRPr>
+          </a:p>
+          <a:p>
+            <a:pPr indent="-330200" lvl="0" marL="457200" rtl="0" algn="l">
+              <a:lnSpc>
+                <a:spcPct val="115000"/>
+              </a:lnSpc>
+              <a:spcBef>
+                <a:spcPts val="0"/>
+              </a:spcBef>
+              <a:spcAft>
+                <a:spcPts val="0"/>
+              </a:spcAft>
+              <a:buSzPts val="1600"/>
+              <a:buFont typeface="Arial"/>
+              <a:buAutoNum type="arabicPeriod"/>
+            </a:pPr>
+            <a:r>
+              <a:rPr lang="en-US" sz="1600">
+                <a:latin typeface="Arial"/>
+                <a:ea typeface="Arial"/>
+                <a:cs typeface="Arial"/>
+                <a:sym typeface="Arial"/>
+              </a:rPr>
+              <a:t>Capacidade de 100.000 elementos</a:t>
+            </a:r>
+            <a:endParaRPr sz="1600">
+              <a:latin typeface="Arial"/>
+              <a:ea typeface="Arial"/>
+              <a:cs typeface="Arial"/>
+              <a:sym typeface="Arial"/>
+            </a:endParaRPr>
+          </a:p>
+          <a:p>
+            <a:pPr indent="-330200" lvl="0" marL="457200" rtl="0" algn="l">
+              <a:lnSpc>
+                <a:spcPct val="115000"/>
+              </a:lnSpc>
+              <a:spcBef>
+                <a:spcPts val="0"/>
+              </a:spcBef>
+              <a:spcAft>
+                <a:spcPts val="0"/>
+              </a:spcAft>
+              <a:buSzPts val="1600"/>
+              <a:buFont typeface="Arial"/>
+              <a:buAutoNum type="arabicPeriod"/>
+            </a:pPr>
+            <a:r>
+              <a:rPr lang="en-US" sz="1600">
+                <a:latin typeface="Arial"/>
+                <a:ea typeface="Arial"/>
+                <a:cs typeface="Arial"/>
+                <a:sym typeface="Arial"/>
+              </a:rPr>
+              <a:t>Registrar tempo inicial</a:t>
+            </a:r>
+            <a:endParaRPr sz="1600">
+              <a:latin typeface="Arial"/>
+              <a:ea typeface="Arial"/>
+              <a:cs typeface="Arial"/>
+              <a:sym typeface="Arial"/>
+            </a:endParaRPr>
+          </a:p>
+          <a:p>
+            <a:pPr indent="0" lvl="0" marL="0" rtl="0" algn="l">
+              <a:lnSpc>
+                <a:spcPct val="115000"/>
+              </a:lnSpc>
+              <a:spcBef>
+                <a:spcPts val="1200"/>
+              </a:spcBef>
+              <a:spcAft>
+                <a:spcPts val="0"/>
+              </a:spcAft>
+              <a:buNone/>
+            </a:pPr>
+            <a:r>
+              <a:rPr lang="en-US" sz="1600">
+                <a:latin typeface="Arial"/>
+                <a:ea typeface="Arial"/>
+                <a:cs typeface="Arial"/>
+                <a:sym typeface="Arial"/>
+              </a:rPr>
+              <a:t>T1 = System.nanoTime()</a:t>
+            </a:r>
+            <a:endParaRPr sz="1600">
+              <a:latin typeface="Arial"/>
+              <a:ea typeface="Arial"/>
+              <a:cs typeface="Arial"/>
+              <a:sym typeface="Arial"/>
+            </a:endParaRPr>
+          </a:p>
+          <a:p>
+            <a:pPr indent="-330200" lvl="0" marL="457200" rtl="0" algn="l">
+              <a:lnSpc>
+                <a:spcPct val="115000"/>
+              </a:lnSpc>
+              <a:spcBef>
+                <a:spcPts val="1200"/>
+              </a:spcBef>
+              <a:spcAft>
+                <a:spcPts val="0"/>
+              </a:spcAft>
+              <a:buSzPts val="1600"/>
+              <a:buFont typeface="Arial"/>
+              <a:buAutoNum type="arabicPeriod"/>
+            </a:pPr>
+            <a:r>
+              <a:rPr lang="en-US" sz="1600">
+                <a:latin typeface="Arial"/>
+                <a:ea typeface="Arial"/>
+                <a:cs typeface="Arial"/>
+                <a:sym typeface="Arial"/>
+              </a:rPr>
+              <a:t>Executar operação</a:t>
+            </a:r>
+            <a:endParaRPr sz="1600">
+              <a:latin typeface="Arial"/>
+              <a:ea typeface="Arial"/>
+              <a:cs typeface="Arial"/>
+              <a:sym typeface="Arial"/>
+            </a:endParaRPr>
+          </a:p>
+          <a:p>
+            <a:pPr indent="-330200" lvl="0" marL="457200" rtl="0" algn="l">
+              <a:lnSpc>
+                <a:spcPct val="115000"/>
+              </a:lnSpc>
+              <a:spcBef>
+                <a:spcPts val="0"/>
+              </a:spcBef>
+              <a:spcAft>
+                <a:spcPts val="0"/>
+              </a:spcAft>
+              <a:buSzPts val="1600"/>
+              <a:buFont typeface="Arial"/>
+              <a:buAutoNum type="arabicPeriod"/>
+            </a:pPr>
+            <a:r>
+              <a:rPr lang="en-US" sz="1600">
+                <a:latin typeface="Arial"/>
+                <a:ea typeface="Arial"/>
+                <a:cs typeface="Arial"/>
+                <a:sym typeface="Arial"/>
+              </a:rPr>
+              <a:t>Registrar tempo final</a:t>
+            </a:r>
+            <a:br>
+              <a:rPr lang="en-US" sz="1600">
+                <a:latin typeface="Arial"/>
+                <a:ea typeface="Arial"/>
+                <a:cs typeface="Arial"/>
+                <a:sym typeface="Arial"/>
+              </a:rPr>
+            </a:br>
+            <a:endParaRPr sz="1600">
+              <a:latin typeface="Arial"/>
+              <a:ea typeface="Arial"/>
+              <a:cs typeface="Arial"/>
+              <a:sym typeface="Arial"/>
+            </a:endParaRPr>
+          </a:p>
+          <a:p>
+            <a:pPr indent="0" lvl="0" marL="0" rtl="0" algn="l">
+              <a:lnSpc>
+                <a:spcPct val="115000"/>
+              </a:lnSpc>
+              <a:spcBef>
+                <a:spcPts val="1200"/>
+              </a:spcBef>
+              <a:spcAft>
+                <a:spcPts val="0"/>
+              </a:spcAft>
+              <a:buNone/>
+            </a:pPr>
+            <a:r>
+              <a:rPr lang="en-US" sz="1600">
+                <a:latin typeface="Arial"/>
+                <a:ea typeface="Arial"/>
+                <a:cs typeface="Arial"/>
+                <a:sym typeface="Arial"/>
+              </a:rPr>
+              <a:t>T2 = System.nanoTime()</a:t>
+            </a:r>
+            <a:endParaRPr sz="1600">
+              <a:latin typeface="Arial"/>
+              <a:ea typeface="Arial"/>
+              <a:cs typeface="Arial"/>
+              <a:sym typeface="Arial"/>
+            </a:endParaRPr>
+          </a:p>
+          <a:p>
+            <a:pPr indent="-330200" lvl="0" marL="457200" rtl="0" algn="l">
+              <a:lnSpc>
+                <a:spcPct val="115000"/>
+              </a:lnSpc>
+              <a:spcBef>
+                <a:spcPts val="1200"/>
+              </a:spcBef>
+              <a:spcAft>
+                <a:spcPts val="0"/>
+              </a:spcAft>
+              <a:buSzPts val="1600"/>
+              <a:buFont typeface="Arial"/>
+              <a:buAutoNum type="arabicPeriod"/>
+            </a:pPr>
+            <a:r>
+              <a:rPr lang="en-US" sz="1600">
+                <a:latin typeface="Arial"/>
+                <a:ea typeface="Arial"/>
+                <a:cs typeface="Arial"/>
+                <a:sym typeface="Arial"/>
+              </a:rPr>
+              <a:t>Calcular tempo total</a:t>
+            </a:r>
+            <a:br>
+              <a:rPr lang="en-US" sz="1600">
+                <a:latin typeface="Arial"/>
+                <a:ea typeface="Arial"/>
+                <a:cs typeface="Arial"/>
+                <a:sym typeface="Arial"/>
+              </a:rPr>
+            </a:br>
+            <a:endParaRPr sz="1600">
+              <a:latin typeface="Arial"/>
+              <a:ea typeface="Arial"/>
+              <a:cs typeface="Arial"/>
+              <a:sym typeface="Arial"/>
+            </a:endParaRPr>
+          </a:p>
+          <a:p>
+            <a:pPr indent="0" lvl="0" marL="0" rtl="0" algn="l">
+              <a:lnSpc>
+                <a:spcPct val="115000"/>
+              </a:lnSpc>
+              <a:spcBef>
+                <a:spcPts val="1200"/>
+              </a:spcBef>
+              <a:spcAft>
+                <a:spcPts val="0"/>
+              </a:spcAft>
+              <a:buNone/>
+            </a:pPr>
+            <a:r>
+              <a:rPr lang="en-US" sz="1600">
+                <a:latin typeface="Arial"/>
+                <a:ea typeface="Arial"/>
+                <a:cs typeface="Arial"/>
+                <a:sym typeface="Arial"/>
+              </a:rPr>
+              <a:t>Total = T2 - T1</a:t>
+            </a:r>
+            <a:endParaRPr sz="1600">
+              <a:latin typeface="Arial"/>
+              <a:ea typeface="Arial"/>
+              <a:cs typeface="Arial"/>
+              <a:sym typeface="Arial"/>
+            </a:endParaRPr>
+          </a:p>
+          <a:p>
+            <a:pPr indent="0" lvl="0" marL="0" rtl="0" algn="l">
+              <a:lnSpc>
+                <a:spcPct val="115000"/>
+              </a:lnSpc>
+              <a:spcBef>
+                <a:spcPts val="1200"/>
+              </a:spcBef>
+              <a:spcAft>
+                <a:spcPts val="1200"/>
+              </a:spcAft>
+              <a:buNone/>
+            </a:pPr>
+            <a:r>
+              <a:rPr lang="en-US" sz="1600">
+                <a:latin typeface="Arial"/>
+                <a:ea typeface="Arial"/>
+                <a:cs typeface="Arial"/>
+                <a:sym typeface="Arial"/>
+              </a:rPr>
+              <a:t>Cada experimento foi executado 100 vezes.</a:t>
+            </a:r>
+            <a:endParaRPr sz="1600"/>
+          </a:p>
+        </p:txBody>
+      </p:sp>
+    </p:spTree>
+  </p:cSld>
+  <p:clrMapOvr>
+    <a:masterClrMapping/>
+  </p:clrMapOvr>
+</p:sld>
+</file>
+
+<file path=ppt/slides/slide7.xml><?xml version="1.0" encoding="utf-8"?>
+<p:sld xmlns:a="http://schemas.openxmlformats.org/drawingml/2006/main" xmlns:r="http://schemas.openxmlformats.org/officeDocument/2006/relationships" xmlns:mc="http://schemas.openxmlformats.org/markup-compatibility/2006" xmlns:mv="urn:schemas-microsoft-com:mac:vml" xmlns:p="http://schemas.openxmlformats.org/presentationml/2006/main" xmlns:c="http://schemas.openxmlformats.org/drawingml/2006/chart" xmlns:dgm="http://schemas.openxmlformats.org/drawingml/2006/diagram" xmlns:o="urn:schemas-microsoft-com:office:office" xmlns:v="urn:schemas-microsoft-com:vml" xmlns:pvml="urn:schemas-microsoft-com:office:powerpoint" xmlns:com="http://schemas.openxmlformats.org/drawingml/2006/compatibility" xmlns:p14="http://schemas.microsoft.com/office/powerpoint/2010/main" xmlns:p15="http://schemas.microsoft.com/office/powerpoint/2012/main" xmlns:ahyp="http://schemas.microsoft.com/office/drawing/2018/hyperlinkcolor">
+  <p:cSld>
+    <p:spTree>
+      <p:nvGrpSpPr>
+        <p:cNvPr id="120" name="Shape 120"/>
+        <p:cNvGrpSpPr/>
+        <p:nvPr/>
+      </p:nvGrpSpPr>
+      <p:grpSpPr>
+        <a:xfrm>
+          <a:off x="0" y="0"/>
+          <a:ext cx="0" cy="0"/>
+          <a:chOff x="0" y="0"/>
+          <a:chExt cx="0" cy="0"/>
+        </a:xfrm>
+      </p:grpSpPr>
+      <p:sp>
+        <p:nvSpPr>
+          <p:cNvPr id="121" name="Google Shape;121;p5"/>
           <p:cNvSpPr txBox="1"/>
           <p:nvPr>
             <p:ph type="title"/>
@@ -12395,7 +14477,7 @@
       </p:sp>
       <p:graphicFrame>
         <p:nvGraphicFramePr>
-          <p:cNvPr id="110" name="Google Shape;110;p5"/>
+          <p:cNvPr id="122" name="Google Shape;122;p5"/>
           <p:cNvGraphicFramePr/>
           <p:nvPr/>
         </p:nvGraphicFramePr>
@@ -12408,7 +14490,7 @@
             <a:tbl>
               <a:tblPr bandRow="1" firstRow="1">
                 <a:noFill/>
-                <a:tableStyleId>{A589A386-CE26-4AC0-A8ED-93DCB4A317E9}</a:tableStyleId>
+                <a:tableStyleId>{5A032439-F29E-4A91-98AA-5B8249697A69}</a:tableStyleId>
               </a:tblPr>
               <a:tblGrid>
                 <a:gridCol w="2743200"/>
@@ -12466,12 +14548,8 @@
                           <a:solidFill>
                             <a:schemeClr val="dk1"/>
                           </a:solidFill>
-                          <a:latin typeface="Calibri"/>
-                          <a:ea typeface="Calibri"/>
-                          <a:cs typeface="Calibri"/>
-                          <a:sym typeface="Calibri"/>
                         </a:rPr>
-                        <a:t>Tempo Médio (ns)</a:t>
+                        <a:t>Ordenação crescente</a:t>
                       </a:r>
                       <a:endParaRPr/>
                     </a:p>
@@ -12497,12 +14575,8 @@
                           <a:solidFill>
                             <a:schemeClr val="dk1"/>
                           </a:solidFill>
-                          <a:latin typeface="Calibri"/>
-                          <a:ea typeface="Calibri"/>
-                          <a:cs typeface="Calibri"/>
-                          <a:sym typeface="Calibri"/>
                         </a:rPr>
-                        <a:t>Desvio Padrão</a:t>
+                        <a:t>Ordenação decrescente</a:t>
                       </a:r>
                       <a:endParaRPr/>
                     </a:p>
@@ -12557,16 +14631,8 @@
                         <a:buNone/>
                       </a:pPr>
                       <a:r>
-                        <a:rPr lang="en-US" sz="1800">
-                          <a:solidFill>
-                            <a:schemeClr val="dk1"/>
-                          </a:solidFill>
-                          <a:latin typeface="Calibri"/>
-                          <a:ea typeface="Calibri"/>
-                          <a:cs typeface="Calibri"/>
-                          <a:sym typeface="Calibri"/>
-                        </a:rPr>
-                        <a:t>6.9075374E8</a:t>
+                        <a:rPr lang="en-US" sz="1800"/>
+                        <a:t>7.20E8 ± 8.21E7</a:t>
                       </a:r>
                       <a:endParaRPr/>
                     </a:p>
@@ -12588,16 +14654,8 @@
                         <a:buNone/>
                       </a:pPr>
                       <a:r>
-                        <a:rPr lang="en-US" sz="1800">
-                          <a:solidFill>
-                            <a:schemeClr val="dk1"/>
-                          </a:solidFill>
-                          <a:latin typeface="Calibri"/>
-                          <a:ea typeface="Calibri"/>
-                          <a:cs typeface="Calibri"/>
-                          <a:sym typeface="Calibri"/>
-                        </a:rPr>
-                        <a:t>3.293494E6</a:t>
+                        <a:rPr lang="en-US" sz="1800"/>
+                        <a:t>7.20E8 ± 8.21E7</a:t>
                       </a:r>
                       <a:endParaRPr/>
                     </a:p>
@@ -12652,16 +14710,8 @@
                         <a:buNone/>
                       </a:pPr>
                       <a:r>
-                        <a:rPr lang="en-US" sz="1800">
-                          <a:solidFill>
-                            <a:schemeClr val="dk1"/>
-                          </a:solidFill>
-                          <a:latin typeface="Calibri"/>
-                          <a:ea typeface="Calibri"/>
-                          <a:cs typeface="Calibri"/>
-                          <a:sym typeface="Calibri"/>
-                        </a:rPr>
-                        <a:t>6.85612145E8</a:t>
+                        <a:rPr lang="en-US" sz="1800"/>
+                        <a:t>7.19E8 ± 7.66E7</a:t>
                       </a:r>
                       <a:endParaRPr/>
                     </a:p>
@@ -12683,16 +14733,8 @@
                         <a:buNone/>
                       </a:pPr>
                       <a:r>
-                        <a:rPr lang="en-US" sz="1800">
-                          <a:solidFill>
-                            <a:schemeClr val="dk1"/>
-                          </a:solidFill>
-                          <a:latin typeface="Calibri"/>
-                          <a:ea typeface="Calibri"/>
-                          <a:cs typeface="Calibri"/>
-                          <a:sym typeface="Calibri"/>
-                        </a:rPr>
-                        <a:t>1.4887207178E9</a:t>
+                        <a:rPr lang="en-US" sz="1800"/>
+                        <a:t>7.19E8 ± 7.66E7</a:t>
                       </a:r>
                       <a:endParaRPr/>
                     </a:p>
@@ -12747,16 +14789,8 @@
                         <a:buNone/>
                       </a:pPr>
                       <a:r>
-                        <a:rPr lang="en-US" sz="1800">
-                          <a:solidFill>
-                            <a:schemeClr val="dk1"/>
-                          </a:solidFill>
-                          <a:latin typeface="Calibri"/>
-                          <a:ea typeface="Calibri"/>
-                          <a:cs typeface="Calibri"/>
-                          <a:sym typeface="Calibri"/>
-                        </a:rPr>
-                        <a:t>7.43845246E8</a:t>
+                        <a:rPr lang="en-US" sz="1800"/>
+                        <a:t>7.03E8 ± 1.54E8</a:t>
                       </a:r>
                       <a:endParaRPr/>
                     </a:p>
@@ -12778,16 +14812,8 @@
                         <a:buNone/>
                       </a:pPr>
                       <a:r>
-                        <a:rPr lang="en-US" sz="1800">
-                          <a:solidFill>
-                            <a:schemeClr val="dk1"/>
-                          </a:solidFill>
-                          <a:latin typeface="Calibri"/>
-                          <a:ea typeface="Calibri"/>
-                          <a:cs typeface="Calibri"/>
-                          <a:sym typeface="Calibri"/>
-                        </a:rPr>
-                        <a:t>2.333601046E8</a:t>
+                        <a:rPr lang="en-US" sz="1800"/>
+                        <a:t>7.03E8 ± 1.54E8</a:t>
                       </a:r>
                       <a:endParaRPr/>
                     </a:p>
@@ -12807,12 +14833,12 @@
 </p:sld>
 </file>
 
-<file path=ppt/slides/slide6.xml><?xml version="1.0" encoding="utf-8"?>
+<file path=ppt/slides/slide8.xml><?xml version="1.0" encoding="utf-8"?>
 <p:sld xmlns:a="http://schemas.openxmlformats.org/drawingml/2006/main" xmlns:r="http://schemas.openxmlformats.org/officeDocument/2006/relationships" xmlns:mc="http://schemas.openxmlformats.org/markup-compatibility/2006" xmlns:mv="urn:schemas-microsoft-com:mac:vml" xmlns:p="http://schemas.openxmlformats.org/presentationml/2006/main" xmlns:c="http://schemas.openxmlformats.org/drawingml/2006/chart" xmlns:dgm="http://schemas.openxmlformats.org/drawingml/2006/diagram" xmlns:o="urn:schemas-microsoft-com:office:office" xmlns:v="urn:schemas-microsoft-com:vml" xmlns:pvml="urn:schemas-microsoft-com:office:powerpoint" xmlns:com="http://schemas.openxmlformats.org/drawingml/2006/compatibility" xmlns:p14="http://schemas.microsoft.com/office/powerpoint/2010/main" xmlns:p15="http://schemas.microsoft.com/office/powerpoint/2012/main" xmlns:ahyp="http://schemas.microsoft.com/office/drawing/2018/hyperlinkcolor">
   <p:cSld>
     <p:spTree>
       <p:nvGrpSpPr>
-        <p:cNvPr id="114" name="Shape 114"/>
+        <p:cNvPr id="126" name="Shape 126"/>
         <p:cNvGrpSpPr/>
         <p:nvPr/>
       </p:nvGrpSpPr>
@@ -12826,7 +14852,7 @@
       </p:grpSpPr>
       <p:sp>
         <p:nvSpPr>
-          <p:cNvPr id="115" name="Google Shape;115;p6"/>
+          <p:cNvPr id="127" name="Google Shape;127;p6"/>
           <p:cNvSpPr txBox="1"/>
           <p:nvPr>
             <p:ph type="title"/>
@@ -12899,7 +14925,7 @@
       </p:sp>
       <p:graphicFrame>
         <p:nvGraphicFramePr>
-          <p:cNvPr id="116" name="Google Shape;116;p6"/>
+          <p:cNvPr id="128" name="Google Shape;128;p6"/>
           <p:cNvGraphicFramePr/>
           <p:nvPr/>
         </p:nvGraphicFramePr>
@@ -12912,7 +14938,7 @@
             <a:tbl>
               <a:tblPr bandRow="1" firstRow="1">
                 <a:noFill/>
-                <a:tableStyleId>{A589A386-CE26-4AC0-A8ED-93DCB4A317E9}</a:tableStyleId>
+                <a:tableStyleId>{5A032439-F29E-4A91-98AA-5B8249697A69}</a:tableStyleId>
               </a:tblPr>
               <a:tblGrid>
                 <a:gridCol w="2743200"/>
@@ -13061,16 +15087,8 @@
                         <a:buNone/>
                       </a:pPr>
                       <a:r>
-                        <a:rPr lang="en-US" sz="1800">
-                          <a:solidFill>
-                            <a:schemeClr val="dk1"/>
-                          </a:solidFill>
-                          <a:latin typeface="Calibri"/>
-                          <a:ea typeface="Calibri"/>
-                          <a:cs typeface="Calibri"/>
-                          <a:sym typeface="Calibri"/>
-                        </a:rPr>
-                        <a:t>2.27754282E8</a:t>
+                        <a:rPr lang="en-US" sz="1800"/>
+                        <a:t>2.34E8</a:t>
                       </a:r>
                       <a:endParaRPr/>
                     </a:p>
@@ -13092,16 +15110,8 @@
                         <a:buNone/>
                       </a:pPr>
                       <a:r>
-                        <a:rPr lang="en-US" sz="1800">
-                          <a:solidFill>
-                            <a:schemeClr val="dk1"/>
-                          </a:solidFill>
-                          <a:latin typeface="Calibri"/>
-                          <a:ea typeface="Calibri"/>
-                          <a:cs typeface="Calibri"/>
-                          <a:sym typeface="Calibri"/>
-                        </a:rPr>
-                        <a:t>6.798707E6</a:t>
+                        <a:rPr lang="en-US" sz="1800"/>
+                        <a:t>1.66E7</a:t>
                       </a:r>
                       <a:endParaRPr/>
                     </a:p>
@@ -13156,16 +15166,8 @@
                         <a:buNone/>
                       </a:pPr>
                       <a:r>
-                        <a:rPr lang="en-US" sz="1800">
-                          <a:solidFill>
-                            <a:schemeClr val="dk1"/>
-                          </a:solidFill>
-                          <a:latin typeface="Calibri"/>
-                          <a:ea typeface="Calibri"/>
-                          <a:cs typeface="Calibri"/>
-                          <a:sym typeface="Calibri"/>
-                        </a:rPr>
-                        <a:t>6.89827005E8</a:t>
+                        <a:rPr lang="en-US" sz="1800"/>
+                        <a:t>2.36E8</a:t>
                       </a:r>
                       <a:endParaRPr/>
                     </a:p>
@@ -13187,16 +15189,8 @@
                         <a:buNone/>
                       </a:pPr>
                       <a:r>
-                        <a:rPr lang="en-US" sz="1800">
-                          <a:solidFill>
-                            <a:schemeClr val="dk1"/>
-                          </a:solidFill>
-                          <a:latin typeface="Calibri"/>
-                          <a:ea typeface="Calibri"/>
-                          <a:cs typeface="Calibri"/>
-                          <a:sym typeface="Calibri"/>
-                        </a:rPr>
-                        <a:t>1.39528654E7</a:t>
+                        <a:rPr lang="en-US" sz="1800"/>
+                        <a:t>1.80E7</a:t>
                       </a:r>
                       <a:endParaRPr/>
                     </a:p>
@@ -13251,16 +15245,8 @@
                         <a:buNone/>
                       </a:pPr>
                       <a:r>
-                        <a:rPr lang="en-US" sz="1800">
-                          <a:solidFill>
-                            <a:schemeClr val="dk1"/>
-                          </a:solidFill>
-                          <a:latin typeface="Calibri"/>
-                          <a:ea typeface="Calibri"/>
-                          <a:cs typeface="Calibri"/>
-                          <a:sym typeface="Calibri"/>
-                        </a:rPr>
-                        <a:t>6.37637495E8</a:t>
+                        <a:rPr lang="en-US" sz="1800"/>
+                        <a:t>5.27E8</a:t>
                       </a:r>
                       <a:endParaRPr/>
                     </a:p>
@@ -13282,16 +15268,8 @@
                         <a:buNone/>
                       </a:pPr>
                       <a:r>
-                        <a:rPr lang="en-US" sz="1800">
-                          <a:solidFill>
-                            <a:schemeClr val="dk1"/>
-                          </a:solidFill>
-                          <a:latin typeface="Calibri"/>
-                          <a:ea typeface="Calibri"/>
-                          <a:cs typeface="Calibri"/>
-                          <a:sym typeface="Calibri"/>
-                        </a:rPr>
-                        <a:t>3.36363519E7</a:t>
+                        <a:rPr lang="en-US" sz="1800"/>
+                        <a:t>7.00E7</a:t>
                       </a:r>
                       <a:endParaRPr/>
                     </a:p>
@@ -13311,12 +15289,12 @@
 </p:sld>
 </file>
 
-<file path=ppt/slides/slide7.xml><?xml version="1.0" encoding="utf-8"?>
+<file path=ppt/slides/slide9.xml><?xml version="1.0" encoding="utf-8"?>
 <p:sld xmlns:a="http://schemas.openxmlformats.org/drawingml/2006/main" xmlns:r="http://schemas.openxmlformats.org/officeDocument/2006/relationships" xmlns:mc="http://schemas.openxmlformats.org/markup-compatibility/2006" xmlns:mv="urn:schemas-microsoft-com:mac:vml" xmlns:p="http://schemas.openxmlformats.org/presentationml/2006/main" xmlns:c="http://schemas.openxmlformats.org/drawingml/2006/chart" xmlns:dgm="http://schemas.openxmlformats.org/drawingml/2006/diagram" xmlns:o="urn:schemas-microsoft-com:office:office" xmlns:v="urn:schemas-microsoft-com:vml" xmlns:pvml="urn:schemas-microsoft-com:office:powerpoint" xmlns:com="http://schemas.openxmlformats.org/drawingml/2006/compatibility" xmlns:p14="http://schemas.microsoft.com/office/powerpoint/2010/main" xmlns:p15="http://schemas.microsoft.com/office/powerpoint/2012/main" xmlns:ahyp="http://schemas.microsoft.com/office/drawing/2018/hyperlinkcolor">
   <p:cSld>
     <p:spTree>
       <p:nvGrpSpPr>
-        <p:cNvPr id="120" name="Shape 120"/>
+        <p:cNvPr id="132" name="Shape 132"/>
         <p:cNvGrpSpPr/>
         <p:nvPr/>
       </p:nvGrpSpPr>
@@ -13330,7 +15308,7 @@
       </p:grpSpPr>
       <p:sp>
         <p:nvSpPr>
-          <p:cNvPr id="121" name="Google Shape;121;p7"/>
+          <p:cNvPr id="133" name="Google Shape;133;p7"/>
           <p:cNvSpPr txBox="1"/>
           <p:nvPr>
             <p:ph type="title"/>
@@ -13387,7 +15365,7 @@
       </p:sp>
       <p:sp>
         <p:nvSpPr>
-          <p:cNvPr id="122" name="Google Shape;122;p7"/>
+          <p:cNvPr id="134" name="Google Shape;134;p7"/>
           <p:cNvSpPr txBox="1"/>
           <p:nvPr>
             <p:ph idx="1" type="body"/>
@@ -13413,303 +15391,6 @@
           <a:lstStyle/>
           <a:p>
             <a:pPr indent="0" lvl="0" marL="0" rtl="0" algn="l">
-              <a:spcBef>
-                <a:spcPts val="0"/>
-              </a:spcBef>
-              <a:spcAft>
-                <a:spcPts val="0"/>
-              </a:spcAft>
-              <a:buNone/>
-            </a:pPr>
-            <a:r>
-              <a:rPr lang="en-US" sz="2500">
-                <a:solidFill>
-                  <a:schemeClr val="dk1"/>
-                </a:solidFill>
-                <a:latin typeface="Calibri"/>
-                <a:ea typeface="Calibri"/>
-                <a:cs typeface="Calibri"/>
-                <a:sym typeface="Calibri"/>
-              </a:rPr>
-              <a:t>Inserção:</a:t>
-            </a:r>
-            <a:endParaRPr sz="2500"/>
-          </a:p>
-          <a:p>
-            <a:pPr indent="-298450" lvl="0" marL="342900" rtl="0" algn="l">
-              <a:spcBef>
-                <a:spcPts val="640"/>
-              </a:spcBef>
-              <a:spcAft>
-                <a:spcPts val="0"/>
-              </a:spcAft>
-              <a:buClr>
-                <a:schemeClr val="dk1"/>
-              </a:buClr>
-              <a:buSzPts val="2500"/>
-              <a:buChar char="•"/>
-            </a:pPr>
-            <a:r>
-              <a:rPr lang="en-US" sz="2500">
-                <a:solidFill>
-                  <a:schemeClr val="dk1"/>
-                </a:solidFill>
-                <a:latin typeface="Calibri"/>
-                <a:ea typeface="Calibri"/>
-                <a:cs typeface="Calibri"/>
-                <a:sym typeface="Calibri"/>
-              </a:rPr>
-              <a:t>Inserções exigem deslocamento de elementos.</a:t>
-            </a:r>
-            <a:endParaRPr sz="2500"/>
-          </a:p>
-          <a:p>
-            <a:pPr indent="-298450" lvl="0" marL="342900" rtl="0" algn="l">
-              <a:spcBef>
-                <a:spcPts val="640"/>
-              </a:spcBef>
-              <a:spcAft>
-                <a:spcPts val="0"/>
-              </a:spcAft>
-              <a:buClr>
-                <a:schemeClr val="dk1"/>
-              </a:buClr>
-              <a:buSzPts val="2500"/>
-              <a:buChar char="•"/>
-            </a:pPr>
-            <a:r>
-              <a:rPr lang="en-US" sz="2500">
-                <a:solidFill>
-                  <a:schemeClr val="dk1"/>
-                </a:solidFill>
-                <a:latin typeface="Calibri"/>
-                <a:ea typeface="Calibri"/>
-                <a:cs typeface="Calibri"/>
-                <a:sym typeface="Calibri"/>
-              </a:rPr>
-              <a:t>Quanto maior o deslocamento necessário, maior o tempo.</a:t>
-            </a:r>
-            <a:endParaRPr sz="2500"/>
-          </a:p>
-          <a:p>
-            <a:pPr indent="-139700" lvl="0" marL="342900" rtl="0" algn="l">
-              <a:spcBef>
-                <a:spcPts val="640"/>
-              </a:spcBef>
-              <a:spcAft>
-                <a:spcPts val="0"/>
-              </a:spcAft>
-              <a:buClr>
-                <a:schemeClr val="dk1"/>
-              </a:buClr>
-              <a:buSzPts val="3200"/>
-              <a:buNone/>
-            </a:pPr>
-            <a:r>
-              <a:t/>
-            </a:r>
-            <a:endParaRPr sz="2500">
-              <a:solidFill>
-                <a:schemeClr val="dk1"/>
-              </a:solidFill>
-              <a:latin typeface="Calibri"/>
-              <a:ea typeface="Calibri"/>
-              <a:cs typeface="Calibri"/>
-              <a:sym typeface="Calibri"/>
-            </a:endParaRPr>
-          </a:p>
-          <a:p>
-            <a:pPr indent="0" lvl="0" marL="0" rtl="0" algn="l">
-              <a:spcBef>
-                <a:spcPts val="640"/>
-              </a:spcBef>
-              <a:spcAft>
-                <a:spcPts val="0"/>
-              </a:spcAft>
-              <a:buNone/>
-            </a:pPr>
-            <a:r>
-              <a:rPr lang="en-US" sz="2500">
-                <a:solidFill>
-                  <a:schemeClr val="dk1"/>
-                </a:solidFill>
-                <a:latin typeface="Calibri"/>
-                <a:ea typeface="Calibri"/>
-                <a:cs typeface="Calibri"/>
-                <a:sym typeface="Calibri"/>
-              </a:rPr>
-              <a:t>Exclusão:</a:t>
-            </a:r>
-            <a:endParaRPr sz="2500"/>
-          </a:p>
-          <a:p>
-            <a:pPr indent="-298450" lvl="0" marL="342900" rtl="0" algn="l">
-              <a:spcBef>
-                <a:spcPts val="640"/>
-              </a:spcBef>
-              <a:spcAft>
-                <a:spcPts val="0"/>
-              </a:spcAft>
-              <a:buClr>
-                <a:schemeClr val="dk1"/>
-              </a:buClr>
-              <a:buSzPts val="2500"/>
-              <a:buChar char="•"/>
-            </a:pPr>
-            <a:r>
-              <a:rPr lang="en-US" sz="2500">
-                <a:solidFill>
-                  <a:schemeClr val="dk1"/>
-                </a:solidFill>
-                <a:latin typeface="Calibri"/>
-                <a:ea typeface="Calibri"/>
-                <a:cs typeface="Calibri"/>
-                <a:sym typeface="Calibri"/>
-              </a:rPr>
-              <a:t>A exclusão também exige deslocamentos.</a:t>
-            </a:r>
-            <a:endParaRPr sz="2500"/>
-          </a:p>
-          <a:p>
-            <a:pPr indent="-298450" lvl="0" marL="342900" rtl="0" algn="l">
-              <a:spcBef>
-                <a:spcPts val="640"/>
-              </a:spcBef>
-              <a:spcAft>
-                <a:spcPts val="0"/>
-              </a:spcAft>
-              <a:buClr>
-                <a:schemeClr val="dk1"/>
-              </a:buClr>
-              <a:buSzPts val="2500"/>
-              <a:buChar char="•"/>
-            </a:pPr>
-            <a:r>
-              <a:rPr lang="en-US" sz="2500">
-                <a:solidFill>
-                  <a:schemeClr val="dk1"/>
-                </a:solidFill>
-                <a:latin typeface="Calibri"/>
-                <a:ea typeface="Calibri"/>
-                <a:cs typeface="Calibri"/>
-                <a:sym typeface="Calibri"/>
-              </a:rPr>
-              <a:t>Dependendo da posição do elemento removido, o custo pode variar.</a:t>
-            </a:r>
-            <a:endParaRPr sz="2500"/>
-          </a:p>
-        </p:txBody>
-      </p:sp>
-    </p:spTree>
-  </p:cSld>
-  <p:clrMapOvr>
-    <a:masterClrMapping/>
-  </p:clrMapOvr>
-</p:sld>
-</file>
-
-<file path=ppt/slides/slide8.xml><?xml version="1.0" encoding="utf-8"?>
-<p:sld xmlns:a="http://schemas.openxmlformats.org/drawingml/2006/main" xmlns:r="http://schemas.openxmlformats.org/officeDocument/2006/relationships" xmlns:mc="http://schemas.openxmlformats.org/markup-compatibility/2006" xmlns:mv="urn:schemas-microsoft-com:mac:vml" xmlns:p="http://schemas.openxmlformats.org/presentationml/2006/main" xmlns:c="http://schemas.openxmlformats.org/drawingml/2006/chart" xmlns:dgm="http://schemas.openxmlformats.org/drawingml/2006/diagram" xmlns:o="urn:schemas-microsoft-com:office:office" xmlns:v="urn:schemas-microsoft-com:vml" xmlns:pvml="urn:schemas-microsoft-com:office:powerpoint" xmlns:com="http://schemas.openxmlformats.org/drawingml/2006/compatibility" xmlns:p14="http://schemas.microsoft.com/office/powerpoint/2010/main" xmlns:p15="http://schemas.microsoft.com/office/powerpoint/2012/main" xmlns:ahyp="http://schemas.microsoft.com/office/drawing/2018/hyperlinkcolor">
-  <p:cSld>
-    <p:spTree>
-      <p:nvGrpSpPr>
-        <p:cNvPr id="126" name="Shape 126"/>
-        <p:cNvGrpSpPr/>
-        <p:nvPr/>
-      </p:nvGrpSpPr>
-      <p:grpSpPr>
-        <a:xfrm>
-          <a:off x="0" y="0"/>
-          <a:ext cx="0" cy="0"/>
-          <a:chOff x="0" y="0"/>
-          <a:chExt cx="0" cy="0"/>
-        </a:xfrm>
-      </p:grpSpPr>
-      <p:sp>
-        <p:nvSpPr>
-          <p:cNvPr id="127" name="Google Shape;127;p8"/>
-          <p:cNvSpPr txBox="1"/>
-          <p:nvPr>
-            <p:ph type="title"/>
-          </p:nvPr>
-        </p:nvSpPr>
-        <p:spPr>
-          <a:xfrm>
-            <a:off x="457200" y="274638"/>
-            <a:ext cx="8229600" cy="1143000"/>
-          </a:xfrm>
-          <a:prstGeom prst="rect">
-            <a:avLst/>
-          </a:prstGeom>
-          <a:noFill/>
-          <a:ln>
-            <a:noFill/>
-          </a:ln>
-        </p:spPr>
-        <p:txBody>
-          <a:bodyPr anchorCtr="0" anchor="ctr" bIns="45700" lIns="91425" spcFirstLastPara="1" rIns="91425" wrap="square" tIns="45700">
-            <a:normAutofit/>
-          </a:bodyPr>
-          <a:lstStyle/>
-          <a:p>
-            <a:pPr indent="0" lvl="0" marL="0" rtl="0" algn="ctr">
-              <a:spcBef>
-                <a:spcPts val="0"/>
-              </a:spcBef>
-              <a:spcAft>
-                <a:spcPts val="0"/>
-              </a:spcAft>
-              <a:buClr>
-                <a:schemeClr val="dk1"/>
-              </a:buClr>
-              <a:buSzPts val="4400"/>
-              <a:buFont typeface="Calibri"/>
-              <a:buNone/>
-            </a:pPr>
-            <a:r>
-              <a:rPr lang="en-US" sz="4400">
-                <a:solidFill>
-                  <a:schemeClr val="dk1"/>
-                </a:solidFill>
-                <a:latin typeface="Calibri"/>
-                <a:ea typeface="Calibri"/>
-                <a:cs typeface="Calibri"/>
-                <a:sym typeface="Calibri"/>
-              </a:rPr>
-              <a:t>Conclusão</a:t>
-            </a:r>
-            <a:endParaRPr/>
-          </a:p>
-        </p:txBody>
-      </p:sp>
-      <p:sp>
-        <p:nvSpPr>
-          <p:cNvPr id="128" name="Google Shape;128;p8"/>
-          <p:cNvSpPr txBox="1"/>
-          <p:nvPr>
-            <p:ph idx="1" type="body"/>
-          </p:nvPr>
-        </p:nvSpPr>
-        <p:spPr>
-          <a:xfrm>
-            <a:off x="457200" y="1600200"/>
-            <a:ext cx="8229600" cy="4525963"/>
-          </a:xfrm>
-          <a:prstGeom prst="rect">
-            <a:avLst/>
-          </a:prstGeom>
-          <a:noFill/>
-          <a:ln>
-            <a:noFill/>
-          </a:ln>
-        </p:spPr>
-        <p:txBody>
-          <a:bodyPr anchorCtr="0" anchor="t" bIns="45700" lIns="91425" spcFirstLastPara="1" rIns="91425" wrap="square" tIns="45700">
-            <a:normAutofit fontScale="92500" lnSpcReduction="20000"/>
-          </a:bodyPr>
-          <a:lstStyle/>
-          <a:p>
-            <a:pPr indent="0" lvl="0" marL="0" rtl="0" algn="just">
               <a:lnSpc>
                 <a:spcPct val="115000"/>
               </a:lnSpc>
@@ -13719,16 +15400,228 @@
               <a:spcAft>
                 <a:spcPts val="0"/>
               </a:spcAft>
+              <a:buClr>
+                <a:schemeClr val="dk1"/>
+              </a:buClr>
+              <a:buSzPts val="1100"/>
+              <a:buFont typeface="Arial"/>
               <a:buNone/>
             </a:pPr>
             <a:r>
-              <a:rPr lang="en-US" sz="2500">
+              <a:rPr lang="en-US" sz="1600">
                 <a:latin typeface="Arial"/>
                 <a:ea typeface="Arial"/>
                 <a:cs typeface="Arial"/>
                 <a:sym typeface="Arial"/>
               </a:rPr>
-              <a:t>Os experimentos mostraram que o tempo das operações muda dependendo da forma como os dados são inseridos ou removidos do arranjo. </a:t>
+              <a:t>Durante a operação de inserção:</a:t>
+            </a:r>
+            <a:endParaRPr sz="1600">
+              <a:latin typeface="Arial"/>
+              <a:ea typeface="Arial"/>
+              <a:cs typeface="Arial"/>
+              <a:sym typeface="Arial"/>
+            </a:endParaRPr>
+          </a:p>
+          <a:p>
+            <a:pPr indent="-330200" lvl="0" marL="457200" rtl="0" algn="l">
+              <a:lnSpc>
+                <a:spcPct val="115000"/>
+              </a:lnSpc>
+              <a:spcBef>
+                <a:spcPts val="1200"/>
+              </a:spcBef>
+              <a:spcAft>
+                <a:spcPts val="0"/>
+              </a:spcAft>
+              <a:buSzPts val="1600"/>
+              <a:buAutoNum type="arabicPeriod"/>
+            </a:pPr>
+            <a:r>
+              <a:rPr lang="en-US" sz="1600">
+                <a:latin typeface="Arial"/>
+                <a:ea typeface="Arial"/>
+                <a:cs typeface="Arial"/>
+                <a:sym typeface="Arial"/>
+              </a:rPr>
+              <a:t>O algoritmo precisa percorrer o arranjo para encontrar a posição correta.</a:t>
+            </a:r>
+            <a:endParaRPr sz="1600">
+              <a:latin typeface="Arial"/>
+              <a:ea typeface="Arial"/>
+              <a:cs typeface="Arial"/>
+              <a:sym typeface="Arial"/>
+            </a:endParaRPr>
+          </a:p>
+          <a:p>
+            <a:pPr indent="-330200" lvl="0" marL="457200" rtl="0" algn="l">
+              <a:lnSpc>
+                <a:spcPct val="115000"/>
+              </a:lnSpc>
+              <a:spcBef>
+                <a:spcPts val="0"/>
+              </a:spcBef>
+              <a:spcAft>
+                <a:spcPts val="0"/>
+              </a:spcAft>
+              <a:buSzPts val="1600"/>
+              <a:buAutoNum type="arabicPeriod"/>
+            </a:pPr>
+            <a:r>
+              <a:rPr lang="en-US" sz="1600">
+                <a:latin typeface="Arial"/>
+                <a:ea typeface="Arial"/>
+                <a:cs typeface="Arial"/>
+                <a:sym typeface="Arial"/>
+              </a:rPr>
+              <a:t>Após encontrar a posição, pode ser necessário deslocar vários elementos.</a:t>
+            </a:r>
+            <a:br>
+              <a:rPr lang="en-US" sz="1600">
+                <a:latin typeface="Arial"/>
+                <a:ea typeface="Arial"/>
+                <a:cs typeface="Arial"/>
+                <a:sym typeface="Arial"/>
+              </a:rPr>
+            </a:br>
+            <a:endParaRPr sz="1600">
+              <a:latin typeface="Arial"/>
+              <a:ea typeface="Arial"/>
+              <a:cs typeface="Arial"/>
+              <a:sym typeface="Arial"/>
+            </a:endParaRPr>
+          </a:p>
+          <a:p>
+            <a:pPr indent="0" lvl="0" marL="0" rtl="0" algn="l">
+              <a:lnSpc>
+                <a:spcPct val="115000"/>
+              </a:lnSpc>
+              <a:spcBef>
+                <a:spcPts val="1200"/>
+              </a:spcBef>
+              <a:spcAft>
+                <a:spcPts val="0"/>
+              </a:spcAft>
+              <a:buClr>
+                <a:schemeClr val="dk1"/>
+              </a:buClr>
+              <a:buSzPts val="1100"/>
+              <a:buFont typeface="Arial"/>
+              <a:buNone/>
+            </a:pPr>
+            <a:r>
+              <a:rPr lang="en-US" sz="1600">
+                <a:latin typeface="Arial"/>
+                <a:ea typeface="Arial"/>
+                <a:cs typeface="Arial"/>
+                <a:sym typeface="Arial"/>
+              </a:rPr>
+              <a:t>Isso faz com que o custo da operação dependa de:</a:t>
+            </a:r>
+            <a:endParaRPr sz="1600">
+              <a:latin typeface="Arial"/>
+              <a:ea typeface="Arial"/>
+              <a:cs typeface="Arial"/>
+              <a:sym typeface="Arial"/>
+            </a:endParaRPr>
+          </a:p>
+          <a:p>
+            <a:pPr indent="-330200" lvl="0" marL="457200" rtl="0" algn="l">
+              <a:lnSpc>
+                <a:spcPct val="115000"/>
+              </a:lnSpc>
+              <a:spcBef>
+                <a:spcPts val="1200"/>
+              </a:spcBef>
+              <a:spcAft>
+                <a:spcPts val="0"/>
+              </a:spcAft>
+              <a:buSzPts val="1600"/>
+              <a:buChar char="●"/>
+            </a:pPr>
+            <a:r>
+              <a:rPr lang="en-US" sz="1600">
+                <a:latin typeface="Arial"/>
+                <a:ea typeface="Arial"/>
+                <a:cs typeface="Arial"/>
+                <a:sym typeface="Arial"/>
+              </a:rPr>
+              <a:t>posição de inserção</a:t>
+            </a:r>
+            <a:br>
+              <a:rPr lang="en-US" sz="1600">
+                <a:latin typeface="Arial"/>
+                <a:ea typeface="Arial"/>
+                <a:cs typeface="Arial"/>
+                <a:sym typeface="Arial"/>
+              </a:rPr>
+            </a:br>
+            <a:endParaRPr sz="1600">
+              <a:latin typeface="Arial"/>
+              <a:ea typeface="Arial"/>
+              <a:cs typeface="Arial"/>
+              <a:sym typeface="Arial"/>
+            </a:endParaRPr>
+          </a:p>
+          <a:p>
+            <a:pPr indent="-330200" lvl="0" marL="457200" rtl="0" algn="l">
+              <a:lnSpc>
+                <a:spcPct val="115000"/>
+              </a:lnSpc>
+              <a:spcBef>
+                <a:spcPts val="0"/>
+              </a:spcBef>
+              <a:spcAft>
+                <a:spcPts val="0"/>
+              </a:spcAft>
+              <a:buSzPts val="1600"/>
+              <a:buChar char="●"/>
+            </a:pPr>
+            <a:r>
+              <a:rPr lang="en-US" sz="1600">
+                <a:latin typeface="Arial"/>
+                <a:ea typeface="Arial"/>
+                <a:cs typeface="Arial"/>
+                <a:sym typeface="Arial"/>
+              </a:rPr>
+              <a:t>quantidade de elementos deslocados</a:t>
+            </a:r>
+            <a:br>
+              <a:rPr lang="en-US" sz="1600">
+                <a:latin typeface="Arial"/>
+                <a:ea typeface="Arial"/>
+                <a:cs typeface="Arial"/>
+                <a:sym typeface="Arial"/>
+              </a:rPr>
+            </a:br>
+            <a:endParaRPr sz="1600">
+              <a:latin typeface="Arial"/>
+              <a:ea typeface="Arial"/>
+              <a:cs typeface="Arial"/>
+              <a:sym typeface="Arial"/>
+            </a:endParaRPr>
+          </a:p>
+          <a:p>
+            <a:pPr indent="0" lvl="0" marL="0" rtl="0" algn="l">
+              <a:lnSpc>
+                <a:spcPct val="115000"/>
+              </a:lnSpc>
+              <a:spcBef>
+                <a:spcPts val="1200"/>
+              </a:spcBef>
+              <a:spcAft>
+                <a:spcPts val="1200"/>
+              </a:spcAft>
+              <a:buNone/>
+            </a:pPr>
+            <a:r>
+              <a:rPr lang="en-US" sz="1600">
+                <a:latin typeface="Arial"/>
+                <a:ea typeface="Arial"/>
+                <a:cs typeface="Arial"/>
+                <a:sym typeface="Arial"/>
+              </a:rPr>
+              <a:t>Nos resultados obtidos, os tempos foram relativamente próximos, indicando que o custo de percorrer o arranjo teve grande influência no tempo total.</a:t>
             </a:r>
             <a:endParaRPr sz="2500">
               <a:latin typeface="Arial"/>
@@ -13736,87 +15629,6 @@
               <a:cs typeface="Arial"/>
               <a:sym typeface="Arial"/>
             </a:endParaRPr>
-          </a:p>
-          <a:p>
-            <a:pPr indent="0" lvl="0" marL="0" rtl="0" algn="just">
-              <a:lnSpc>
-                <a:spcPct val="115000"/>
-              </a:lnSpc>
-              <a:spcBef>
-                <a:spcPts val="1200"/>
-              </a:spcBef>
-              <a:spcAft>
-                <a:spcPts val="0"/>
-              </a:spcAft>
-              <a:buNone/>
-            </a:pPr>
-            <a:r>
-              <a:rPr lang="en-US" sz="2500">
-                <a:latin typeface="Arial"/>
-                <a:ea typeface="Arial"/>
-                <a:cs typeface="Arial"/>
-                <a:sym typeface="Arial"/>
-              </a:rPr>
-              <a:t>Nos resultados obtidos, a inserção e exclusão em ordem crescente foram as mais rápidas, enquanto os casos de ordem aleatória foram as mais demoradas.</a:t>
-            </a:r>
-            <a:endParaRPr sz="2500">
-              <a:latin typeface="Arial"/>
-              <a:ea typeface="Arial"/>
-              <a:cs typeface="Arial"/>
-              <a:sym typeface="Arial"/>
-            </a:endParaRPr>
-          </a:p>
-          <a:p>
-            <a:pPr indent="0" lvl="0" marL="0" rtl="0" algn="just">
-              <a:lnSpc>
-                <a:spcPct val="115000"/>
-              </a:lnSpc>
-              <a:spcBef>
-                <a:spcPts val="1200"/>
-              </a:spcBef>
-              <a:spcAft>
-                <a:spcPts val="0"/>
-              </a:spcAft>
-              <a:buClr>
-                <a:schemeClr val="dk1"/>
-              </a:buClr>
-              <a:buSzPct val="44000"/>
-              <a:buFont typeface="Arial"/>
-              <a:buNone/>
-            </a:pPr>
-            <a:r>
-              <a:t/>
-            </a:r>
-            <a:endParaRPr sz="2500">
-              <a:latin typeface="Arial"/>
-              <a:ea typeface="Arial"/>
-              <a:cs typeface="Arial"/>
-              <a:sym typeface="Arial"/>
-            </a:endParaRPr>
-          </a:p>
-          <a:p>
-            <a:pPr indent="0" lvl="0" marL="0" rtl="0" algn="just">
-              <a:lnSpc>
-                <a:spcPct val="115000"/>
-              </a:lnSpc>
-              <a:spcBef>
-                <a:spcPts val="1200"/>
-              </a:spcBef>
-              <a:spcAft>
-                <a:spcPts val="1200"/>
-              </a:spcAft>
-              <a:buNone/>
-            </a:pPr>
-            <a:r>
-              <a:rPr lang="en-US" sz="2500">
-                <a:latin typeface="Arial"/>
-                <a:ea typeface="Arial"/>
-                <a:cs typeface="Arial"/>
-                <a:sym typeface="Arial"/>
-              </a:rPr>
-              <a:t>Isso provavelmente acontece porque, em alguns casos é necessário mover vários elementos dentro do arranjo para manter a ordem. Quanto mais elementos precisam ser movidos, maior será o tempo da operação.</a:t>
-            </a:r>
-            <a:endParaRPr sz="2500"/>
           </a:p>
         </p:txBody>
       </p:sp>
